--- a/entregables/final/presentacion_final.pptx
+++ b/entregables/final/presentacion_final.pptx
@@ -18,6 +18,8 @@
     <p:sldId id="266" r:id="rId17"/>
     <p:sldId id="267" r:id="rId18"/>
     <p:sldId id="268" r:id="rId19"/>
+    <p:sldId id="269" r:id="rId20"/>
+    <p:sldId id="270" r:id="rId21"/>
   </p:sldIdLst>
   <p:sldSz cx="12191695" cy="6858000" type="screen4x3"/>
   <p:notesSz cx="6858000" cy="9144000"/>
@@ -3365,7 +3367,7 @@
                 </a:solidFill>
                 <a:latin typeface="Calibri"/>
               </a:rPr>
-              <a:t>Dónde mira cada arquitectura</a:t>
+              <a:t>Por qué difieren (o no) ResNet y ViT</a:t>
             </a:r>
           </a:p>
         </p:txBody>
@@ -3400,7 +3402,7 @@
                 </a:solidFill>
                 <a:latin typeface="Calibri"/>
               </a:rPr>
-              <a:t>Grad-CAM en la ResNet · attention rollout en el ViT</a:t>
+              <a:t>La ablación sin pre-entrenamiento es la evidencia</a:t>
             </a:r>
           </a:p>
         </p:txBody>
@@ -3449,6 +3451,1497 @@
           </a:p>
         </p:txBody>
       </p:sp>
+      <p:graphicFrame>
+        <p:nvGraphicFramePr>
+          <p:cNvPr id="5" name="Table 4"/>
+          <p:cNvGraphicFramePr>
+            <a:graphicFrameLocks noGrp="1"/>
+          </p:cNvGraphicFramePr>
+          <p:nvPr/>
+        </p:nvGraphicFramePr>
+        <p:xfrm>
+          <a:off x="640080" y="1627632"/>
+          <a:ext cx="10881358" cy="1700784"/>
+        </p:xfrm>
+        <a:graphic>
+          <a:graphicData uri="http://schemas.openxmlformats.org/drawingml/2006/table">
+            <a:tbl>
+              <a:tblPr firstRow="1" bandRow="1">
+                <a:tableStyleId>{5C22544A-7EE6-4342-B048-85BDC9FD1C3A}</a:tableStyleId>
+              </a:tblPr>
+              <a:tblGrid>
+                <a:gridCol w="3557367"/>
+                <a:gridCol w="2092569"/>
+                <a:gridCol w="2092569"/>
+                <a:gridCol w="3138853"/>
+              </a:tblGrid>
+              <a:tr h="384048">
+                <a:tc>
+                  <a:txBody>
+                    <a:bodyPr/>
+                    <a:lstStyle/>
+                    <a:p>
+                      <a:pPr algn="l"/>
+                    </a:p>
+                  </a:txBody>
+                  <a:tcPr anchor="ctr" marL="82296" marR="82296">
+                    <a:solidFill>
+                      <a:srgbClr val="2E6B2F"/>
+                    </a:solidFill>
+                  </a:tcPr>
+                </a:tc>
+                <a:tc>
+                  <a:txBody>
+                    <a:bodyPr/>
+                    <a:lstStyle/>
+                    <a:p>
+                      <a:pPr algn="ctr"/>
+                      <a:r>
+                        <a:rPr sz="1300" b="1">
+                          <a:solidFill>
+                            <a:srgbClr val="FFFFFF"/>
+                          </a:solidFill>
+                          <a:latin typeface="Calibri"/>
+                        </a:rPr>
+                        <a:t>ResNet-50</a:t>
+                      </a:r>
+                    </a:p>
+                  </a:txBody>
+                  <a:tcPr anchor="ctr" marL="82296" marR="82296">
+                    <a:solidFill>
+                      <a:srgbClr val="2E6B2F"/>
+                    </a:solidFill>
+                  </a:tcPr>
+                </a:tc>
+                <a:tc>
+                  <a:txBody>
+                    <a:bodyPr/>
+                    <a:lstStyle/>
+                    <a:p>
+                      <a:pPr algn="ctr"/>
+                      <a:r>
+                        <a:rPr sz="1300" b="1">
+                          <a:solidFill>
+                            <a:srgbClr val="FFFFFF"/>
+                          </a:solidFill>
+                          <a:latin typeface="Calibri"/>
+                        </a:rPr>
+                        <a:t>ViT-S/16</a:t>
+                      </a:r>
+                    </a:p>
+                  </a:txBody>
+                  <a:tcPr anchor="ctr" marL="82296" marR="82296">
+                    <a:solidFill>
+                      <a:srgbClr val="2E6B2F"/>
+                    </a:solidFill>
+                  </a:tcPr>
+                </a:tc>
+                <a:tc>
+                  <a:txBody>
+                    <a:bodyPr/>
+                    <a:lstStyle/>
+                    <a:p>
+                      <a:pPr algn="ctr"/>
+                      <a:r>
+                        <a:rPr sz="1300" b="1">
+                          <a:solidFill>
+                            <a:srgbClr val="FFFFFF"/>
+                          </a:solidFill>
+                          <a:latin typeface="Calibri"/>
+                        </a:rPr>
+                        <a:t>Lectura</a:t>
+                      </a:r>
+                    </a:p>
+                  </a:txBody>
+                  <a:tcPr anchor="ctr" marL="82296" marR="82296">
+                    <a:solidFill>
+                      <a:srgbClr val="2E6B2F"/>
+                    </a:solidFill>
+                  </a:tcPr>
+                </a:tc>
+              </a:tr>
+              <a:tr h="329184">
+                <a:tc>
+                  <a:txBody>
+                    <a:bodyPr/>
+                    <a:lstStyle/>
+                    <a:p>
+                      <a:pPr algn="l"/>
+                      <a:r>
+                        <a:rPr sz="1300" b="0">
+                          <a:solidFill>
+                            <a:srgbClr val="444A52"/>
+                          </a:solidFill>
+                          <a:latin typeface="Calibri"/>
+                        </a:rPr>
+                        <a:t>QWK con ImageNet-1k</a:t>
+                      </a:r>
+                    </a:p>
+                  </a:txBody>
+                  <a:tcPr anchor="ctr" marL="82296" marR="82296">
+                    <a:solidFill>
+                      <a:srgbClr val="FFFFFF"/>
+                    </a:solidFill>
+                  </a:tcPr>
+                </a:tc>
+                <a:tc>
+                  <a:txBody>
+                    <a:bodyPr/>
+                    <a:lstStyle/>
+                    <a:p>
+                      <a:pPr algn="ctr"/>
+                      <a:r>
+                        <a:rPr sz="1300" b="0">
+                          <a:solidFill>
+                            <a:srgbClr val="444A52"/>
+                          </a:solidFill>
+                          <a:latin typeface="Calibri"/>
+                        </a:rPr>
+                        <a:t>0.936</a:t>
+                      </a:r>
+                    </a:p>
+                  </a:txBody>
+                  <a:tcPr anchor="ctr" marL="82296" marR="82296">
+                    <a:solidFill>
+                      <a:srgbClr val="FFFFFF"/>
+                    </a:solidFill>
+                  </a:tcPr>
+                </a:tc>
+                <a:tc>
+                  <a:txBody>
+                    <a:bodyPr/>
+                    <a:lstStyle/>
+                    <a:p>
+                      <a:pPr algn="ctr"/>
+                      <a:r>
+                        <a:rPr sz="1300" b="0">
+                          <a:solidFill>
+                            <a:srgbClr val="444A52"/>
+                          </a:solidFill>
+                          <a:latin typeface="Calibri"/>
+                        </a:rPr>
+                        <a:t>0.931</a:t>
+                      </a:r>
+                    </a:p>
+                  </a:txBody>
+                  <a:tcPr anchor="ctr" marL="82296" marR="82296">
+                    <a:solidFill>
+                      <a:srgbClr val="FFFFFF"/>
+                    </a:solidFill>
+                  </a:tcPr>
+                </a:tc>
+                <a:tc>
+                  <a:txBody>
+                    <a:bodyPr/>
+                    <a:lstStyle/>
+                    <a:p>
+                      <a:pPr algn="ctr"/>
+                    </a:p>
+                  </a:txBody>
+                  <a:tcPr anchor="ctr" marL="82296" marR="82296">
+                    <a:solidFill>
+                      <a:srgbClr val="FFFFFF"/>
+                    </a:solidFill>
+                  </a:tcPr>
+                </a:tc>
+              </a:tr>
+              <a:tr h="329184">
+                <a:tc>
+                  <a:txBody>
+                    <a:bodyPr/>
+                    <a:lstStyle/>
+                    <a:p>
+                      <a:pPr algn="l"/>
+                      <a:r>
+                        <a:rPr sz="1300" b="0">
+                          <a:solidFill>
+                            <a:srgbClr val="444A52"/>
+                          </a:solidFill>
+                          <a:latin typeface="Calibri"/>
+                        </a:rPr>
+                        <a:t>QWK desde cero</a:t>
+                      </a:r>
+                    </a:p>
+                  </a:txBody>
+                  <a:tcPr anchor="ctr" marL="82296" marR="82296">
+                    <a:solidFill>
+                      <a:srgbClr val="F6F7F4"/>
+                    </a:solidFill>
+                  </a:tcPr>
+                </a:tc>
+                <a:tc>
+                  <a:txBody>
+                    <a:bodyPr/>
+                    <a:lstStyle/>
+                    <a:p>
+                      <a:pPr algn="ctr"/>
+                      <a:r>
+                        <a:rPr sz="1300" b="0">
+                          <a:solidFill>
+                            <a:srgbClr val="444A52"/>
+                          </a:solidFill>
+                          <a:latin typeface="Calibri"/>
+                        </a:rPr>
+                        <a:t>0.915</a:t>
+                      </a:r>
+                    </a:p>
+                  </a:txBody>
+                  <a:tcPr anchor="ctr" marL="82296" marR="82296">
+                    <a:solidFill>
+                      <a:srgbClr val="F6F7F4"/>
+                    </a:solidFill>
+                  </a:tcPr>
+                </a:tc>
+                <a:tc>
+                  <a:txBody>
+                    <a:bodyPr/>
+                    <a:lstStyle/>
+                    <a:p>
+                      <a:pPr algn="ctr"/>
+                      <a:r>
+                        <a:rPr sz="1300" b="0">
+                          <a:solidFill>
+                            <a:srgbClr val="444A52"/>
+                          </a:solidFill>
+                          <a:latin typeface="Calibri"/>
+                        </a:rPr>
+                        <a:t>0.889</a:t>
+                      </a:r>
+                    </a:p>
+                  </a:txBody>
+                  <a:tcPr anchor="ctr" marL="82296" marR="82296">
+                    <a:solidFill>
+                      <a:srgbClr val="F6F7F4"/>
+                    </a:solidFill>
+                  </a:tcPr>
+                </a:tc>
+                <a:tc>
+                  <a:txBody>
+                    <a:bodyPr/>
+                    <a:lstStyle/>
+                    <a:p>
+                      <a:pPr algn="ctr"/>
+                    </a:p>
+                  </a:txBody>
+                  <a:tcPr anchor="ctr" marL="82296" marR="82296">
+                    <a:solidFill>
+                      <a:srgbClr val="F6F7F4"/>
+                    </a:solidFill>
+                  </a:tcPr>
+                </a:tc>
+              </a:tr>
+              <a:tr h="329184">
+                <a:tc>
+                  <a:txBody>
+                    <a:bodyPr/>
+                    <a:lstStyle/>
+                    <a:p>
+                      <a:pPr algn="l"/>
+                      <a:r>
+                        <a:rPr sz="1300" b="0">
+                          <a:solidFill>
+                            <a:srgbClr val="444A52"/>
+                          </a:solidFill>
+                          <a:latin typeface="Calibri"/>
+                        </a:rPr>
+                        <a:t>Δ sin pre-entrenamiento</a:t>
+                      </a:r>
+                    </a:p>
+                  </a:txBody>
+                  <a:tcPr anchor="ctr" marL="82296" marR="82296">
+                    <a:solidFill>
+                      <a:srgbClr val="FFFFFF"/>
+                    </a:solidFill>
+                  </a:tcPr>
+                </a:tc>
+                <a:tc>
+                  <a:txBody>
+                    <a:bodyPr/>
+                    <a:lstStyle/>
+                    <a:p>
+                      <a:pPr algn="ctr"/>
+                      <a:r>
+                        <a:rPr sz="1300" b="0">
+                          <a:solidFill>
+                            <a:srgbClr val="444A52"/>
+                          </a:solidFill>
+                          <a:latin typeface="Calibri"/>
+                        </a:rPr>
+                        <a:t>-0.0203</a:t>
+                      </a:r>
+                    </a:p>
+                  </a:txBody>
+                  <a:tcPr anchor="ctr" marL="82296" marR="82296">
+                    <a:solidFill>
+                      <a:srgbClr val="FFFFFF"/>
+                    </a:solidFill>
+                  </a:tcPr>
+                </a:tc>
+                <a:tc>
+                  <a:txBody>
+                    <a:bodyPr/>
+                    <a:lstStyle/>
+                    <a:p>
+                      <a:pPr algn="ctr"/>
+                      <a:r>
+                        <a:rPr sz="1300" b="0">
+                          <a:solidFill>
+                            <a:srgbClr val="444A52"/>
+                          </a:solidFill>
+                          <a:latin typeface="Calibri"/>
+                        </a:rPr>
+                        <a:t>-0.0422</a:t>
+                      </a:r>
+                    </a:p>
+                  </a:txBody>
+                  <a:tcPr anchor="ctr" marL="82296" marR="82296">
+                    <a:solidFill>
+                      <a:srgbClr val="FFFFFF"/>
+                    </a:solidFill>
+                  </a:tcPr>
+                </a:tc>
+                <a:tc>
+                  <a:txBody>
+                    <a:bodyPr/>
+                    <a:lstStyle/>
+                    <a:p>
+                      <a:pPr algn="ctr"/>
+                      <a:r>
+                        <a:rPr sz="1300" b="0">
+                          <a:solidFill>
+                            <a:srgbClr val="444A52"/>
+                          </a:solidFill>
+                          <a:latin typeface="Calibri"/>
+                        </a:rPr>
+                        <a:t>el ViT pierde 2.1× más</a:t>
+                      </a:r>
+                    </a:p>
+                  </a:txBody>
+                  <a:tcPr anchor="ctr" marL="82296" marR="82296">
+                    <a:solidFill>
+                      <a:srgbClr val="FFFFFF"/>
+                    </a:solidFill>
+                  </a:tcPr>
+                </a:tc>
+              </a:tr>
+              <a:tr h="329184">
+                <a:tc>
+                  <a:txBody>
+                    <a:bodyPr/>
+                    <a:lstStyle/>
+                    <a:p>
+                      <a:pPr algn="l"/>
+                      <a:r>
+                        <a:rPr sz="1300" b="0">
+                          <a:solidFill>
+                            <a:srgbClr val="444A52"/>
+                          </a:solidFill>
+                          <a:latin typeface="Calibri"/>
+                        </a:rPr>
+                        <a:t>Δ accuracy sin pre-entren.</a:t>
+                      </a:r>
+                    </a:p>
+                  </a:txBody>
+                  <a:tcPr anchor="ctr" marL="82296" marR="82296">
+                    <a:solidFill>
+                      <a:srgbClr val="F6F7F4"/>
+                    </a:solidFill>
+                  </a:tcPr>
+                </a:tc>
+                <a:tc>
+                  <a:txBody>
+                    <a:bodyPr/>
+                    <a:lstStyle/>
+                    <a:p>
+                      <a:pPr algn="ctr"/>
+                      <a:r>
+                        <a:rPr sz="1300" b="0">
+                          <a:solidFill>
+                            <a:srgbClr val="444A52"/>
+                          </a:solidFill>
+                          <a:latin typeface="Calibri"/>
+                        </a:rPr>
+                        <a:t>-7.4 pts</a:t>
+                      </a:r>
+                    </a:p>
+                  </a:txBody>
+                  <a:tcPr anchor="ctr" marL="82296" marR="82296">
+                    <a:solidFill>
+                      <a:srgbClr val="F6F7F4"/>
+                    </a:solidFill>
+                  </a:tcPr>
+                </a:tc>
+                <a:tc>
+                  <a:txBody>
+                    <a:bodyPr/>
+                    <a:lstStyle/>
+                    <a:p>
+                      <a:pPr algn="ctr"/>
+                      <a:r>
+                        <a:rPr sz="1300" b="0">
+                          <a:solidFill>
+                            <a:srgbClr val="444A52"/>
+                          </a:solidFill>
+                          <a:latin typeface="Calibri"/>
+                        </a:rPr>
+                        <a:t>-11.0 pts</a:t>
+                      </a:r>
+                    </a:p>
+                  </a:txBody>
+                  <a:tcPr anchor="ctr" marL="82296" marR="82296">
+                    <a:solidFill>
+                      <a:srgbClr val="F6F7F4"/>
+                    </a:solidFill>
+                  </a:tcPr>
+                </a:tc>
+                <a:tc>
+                  <a:txBody>
+                    <a:bodyPr/>
+                    <a:lstStyle/>
+                    <a:p>
+                      <a:pPr algn="ctr"/>
+                      <a:r>
+                        <a:rPr sz="1300" b="0">
+                          <a:solidFill>
+                            <a:srgbClr val="444A52"/>
+                          </a:solidFill>
+                          <a:latin typeface="Calibri"/>
+                        </a:rPr>
+                        <a:t>el ViT pierde 1.5× más</a:t>
+                      </a:r>
+                    </a:p>
+                  </a:txBody>
+                  <a:tcPr anchor="ctr" marL="82296" marR="82296">
+                    <a:solidFill>
+                      <a:srgbClr val="F6F7F4"/>
+                    </a:solidFill>
+                  </a:tcPr>
+                </a:tc>
+              </a:tr>
+            </a:tbl>
+          </a:graphicData>
+        </a:graphic>
+      </p:graphicFrame>
+      <p:sp>
+        <p:nvSpPr>
+          <p:cNvPr id="6" name="TextBox 5"/>
+          <p:cNvSpPr txBox="1"/>
+          <p:nvPr/>
+        </p:nvSpPr>
+        <p:spPr>
+          <a:xfrm>
+            <a:off x="640080" y="3913632"/>
+            <a:ext cx="10881360" cy="4206240"/>
+          </a:xfrm>
+          <a:prstGeom prst="rect">
+            <a:avLst/>
+          </a:prstGeom>
+          <a:noFill/>
+        </p:spPr>
+        <p:txBody>
+          <a:bodyPr wrap="square">
+            <a:spAutoFit/>
+          </a:bodyPr>
+          <a:lstStyle/>
+          <a:p>
+            <a:pPr>
+              <a:spcAft>
+                <a:spcPts val="1300"/>
+              </a:spcAft>
+            </a:pPr>
+            <a:r>
+              <a:rPr sz="1500" b="1">
+                <a:solidFill>
+                  <a:srgbClr val="8FB339"/>
+                </a:solidFill>
+              </a:rPr>
+              <a:t>▪  </a:t>
+            </a:r>
+            <a:r>
+              <a:rPr sz="1500" b="1">
+                <a:solidFill>
+                  <a:srgbClr val="444A52"/>
+                </a:solidFill>
+              </a:rPr>
+              <a:t>La ResNet trae el sesgo inductivo incorporado en la arquitectura.</a:t>
+            </a:r>
+          </a:p>
+          <a:p>
+            <a:pPr>
+              <a:spcAft>
+                <a:spcPts val="1300"/>
+              </a:spcAft>
+            </a:pPr>
+            <a:r>
+              <a:rPr sz="1500" b="1">
+                <a:solidFill>
+                  <a:srgbClr val="8FB339"/>
+                </a:solidFill>
+              </a:rPr>
+              <a:t>▪  </a:t>
+            </a:r>
+            <a:r>
+              <a:rPr sz="1500" b="0">
+                <a:solidFill>
+                  <a:srgbClr val="444A52"/>
+                </a:solidFill>
+              </a:rPr>
+              <a:t>La convolución asume localidad y equivarianza a la traslación: una mancha café significa lo mismo esté donde esté en la fruta. Eso no hay que aprenderlo.</a:t>
+            </a:r>
+          </a:p>
+          <a:p>
+            <a:pPr>
+              <a:spcAft>
+                <a:spcPts val="1300"/>
+              </a:spcAft>
+            </a:pPr>
+            <a:r>
+              <a:rPr sz="1500" b="1">
+                <a:solidFill>
+                  <a:srgbClr val="8FB339"/>
+                </a:solidFill>
+              </a:rPr>
+              <a:t>▪  </a:t>
+            </a:r>
+            <a:r>
+              <a:rPr sz="1500" b="1">
+                <a:solidFill>
+                  <a:srgbClr val="444A52"/>
+                </a:solidFill>
+              </a:rPr>
+              <a:t>El ViT tiene que aprender ese sesgo de los datos.</a:t>
+            </a:r>
+          </a:p>
+          <a:p>
+            <a:pPr>
+              <a:spcAft>
+                <a:spcPts val="1300"/>
+              </a:spcAft>
+            </a:pPr>
+            <a:r>
+              <a:rPr sz="1500" b="1">
+                <a:solidFill>
+                  <a:srgbClr val="8FB339"/>
+                </a:solidFill>
+              </a:rPr>
+              <a:t>▪  </a:t>
+            </a:r>
+            <a:r>
+              <a:rPr sz="1500" b="0">
+                <a:solidFill>
+                  <a:srgbClr val="444A52"/>
+                </a:solidFill>
+              </a:rPr>
+              <a:t>La auto-atención es global desde la primera capa y no asume nada sobre estructura espacial. Con 10.208 imágenes de 334 frutas no alcanza para descubrirlo desde cero; con ImageNet-1k detrás, sí.</a:t>
+            </a:r>
+          </a:p>
+          <a:p>
+            <a:pPr>
+              <a:spcAft>
+                <a:spcPts val="1300"/>
+              </a:spcAft>
+            </a:pPr>
+            <a:r>
+              <a:rPr sz="1500" b="1">
+                <a:solidFill>
+                  <a:srgbClr val="8FB339"/>
+                </a:solidFill>
+              </a:rPr>
+              <a:t>▪  </a:t>
+            </a:r>
+            <a:r>
+              <a:rPr sz="1500" b="1">
+                <a:solidFill>
+                  <a:srgbClr val="444A52"/>
+                </a:solidFill>
+              </a:rPr>
+              <a:t>Es un problema de textura local, no de forma global.</a:t>
+            </a:r>
+          </a:p>
+          <a:p>
+            <a:pPr>
+              <a:spcAft>
+                <a:spcPts val="1300"/>
+              </a:spcAft>
+            </a:pPr>
+            <a:r>
+              <a:rPr sz="1500" b="1">
+                <a:solidFill>
+                  <a:srgbClr val="8FB339"/>
+                </a:solidFill>
+              </a:rPr>
+              <a:t>▪  </a:t>
+            </a:r>
+            <a:r>
+              <a:rPr sz="1500" b="0">
+                <a:solidFill>
+                  <a:srgbClr val="444A52"/>
+                </a:solidFill>
+              </a:rPr>
+              <a:t>El índice de madurez se lee en el color y las manchas de la cáscara, justo donde la convolución es fuerte. El campo receptivo global del ViT aporta poco.</a:t>
+            </a:r>
+          </a:p>
+        </p:txBody>
+      </p:sp>
+      <p:sp>
+        <p:nvSpPr>
+          <p:cNvPr id="7" name="TextBox 6"/>
+          <p:cNvSpPr txBox="1"/>
+          <p:nvPr/>
+        </p:nvSpPr>
+        <p:spPr>
+          <a:xfrm>
+            <a:off x="11140135" y="6355080"/>
+            <a:ext cx="640080" cy="320040"/>
+          </a:xfrm>
+          <a:prstGeom prst="rect">
+            <a:avLst/>
+          </a:prstGeom>
+          <a:noFill/>
+        </p:spPr>
+        <p:txBody>
+          <a:bodyPr wrap="square" anchor="t">
+            <a:spAutoFit/>
+          </a:bodyPr>
+          <a:lstStyle/>
+          <a:p>
+            <a:pPr algn="r"/>
+            <a:r>
+              <a:rPr sz="1100" b="0">
+                <a:solidFill>
+                  <a:srgbClr val="8A9098"/>
+                </a:solidFill>
+                <a:latin typeface="Calibri"/>
+              </a:rPr>
+              <a:t>10/15</a:t>
+            </a:r>
+          </a:p>
+        </p:txBody>
+      </p:sp>
+    </p:spTree>
+  </p:cSld>
+  <p:clrMapOvr>
+    <a:masterClrMapping/>
+  </p:clrMapOvr>
+</p:sld>
+</file>
+
+<file path=ppt/slides/slide11.xml><?xml version="1.0" encoding="utf-8"?>
+<p:sld xmlns:a="http://schemas.openxmlformats.org/drawingml/2006/main" xmlns:p="http://schemas.openxmlformats.org/presentationml/2006/main" xmlns:r="http://schemas.openxmlformats.org/officeDocument/2006/relationships">
+  <p:cSld>
+    <p:spTree>
+      <p:nvGrpSpPr>
+        <p:cNvPr id="1" name=""/>
+        <p:cNvGrpSpPr/>
+        <p:nvPr/>
+      </p:nvGrpSpPr>
+      <p:grpSpPr/>
+      <p:sp>
+        <p:nvSpPr>
+          <p:cNvPr id="2" name="TextBox 1"/>
+          <p:cNvSpPr txBox="1"/>
+          <p:nvPr/>
+        </p:nvSpPr>
+        <p:spPr>
+          <a:xfrm>
+            <a:off x="640080" y="384048"/>
+            <a:ext cx="10972800" cy="685800"/>
+          </a:xfrm>
+          <a:prstGeom prst="rect">
+            <a:avLst/>
+          </a:prstGeom>
+          <a:noFill/>
+        </p:spPr>
+        <p:txBody>
+          <a:bodyPr wrap="square" anchor="t">
+            <a:spAutoFit/>
+          </a:bodyPr>
+          <a:lstStyle/>
+          <a:p>
+            <a:pPr algn="l"/>
+            <a:r>
+              <a:rPr sz="3000" b="1">
+                <a:solidFill>
+                  <a:srgbClr val="2E6B2F"/>
+                </a:solidFill>
+                <a:latin typeface="Calibri"/>
+              </a:rPr>
+              <a:t>Los híbridos</a:t>
+            </a:r>
+          </a:p>
+        </p:txBody>
+      </p:sp>
+      <p:sp>
+        <p:nvSpPr>
+          <p:cNvPr id="3" name="TextBox 2"/>
+          <p:cNvSpPr txBox="1"/>
+          <p:nvPr/>
+        </p:nvSpPr>
+        <p:spPr>
+          <a:xfrm>
+            <a:off x="640080" y="1078992"/>
+            <a:ext cx="10972800" cy="457200"/>
+          </a:xfrm>
+          <a:prstGeom prst="rect">
+            <a:avLst/>
+          </a:prstGeom>
+          <a:noFill/>
+        </p:spPr>
+        <p:txBody>
+          <a:bodyPr wrap="square" anchor="t">
+            <a:spAutoFit/>
+          </a:bodyPr>
+          <a:lstStyle/>
+          <a:p>
+            <a:pPr algn="l"/>
+            <a:r>
+              <a:rPr sz="1500" b="0">
+                <a:solidFill>
+                  <a:srgbClr val="8A9098"/>
+                </a:solidFill>
+                <a:latin typeface="Calibri"/>
+              </a:rPr>
+              <a:t>¿Suma combinar ambos enfoques?</a:t>
+            </a:r>
+          </a:p>
+        </p:txBody>
+      </p:sp>
+      <p:sp>
+        <p:nvSpPr>
+          <p:cNvPr id="4" name="Rectangle 3"/>
+          <p:cNvSpPr/>
+          <p:nvPr/>
+        </p:nvSpPr>
+        <p:spPr>
+          <a:xfrm>
+            <a:off x="640080" y="1024128"/>
+            <a:ext cx="1371600" cy="32004"/>
+          </a:xfrm>
+          <a:prstGeom prst="rect">
+            <a:avLst/>
+          </a:prstGeom>
+          <a:solidFill>
+            <a:srgbClr val="8FB339"/>
+          </a:solidFill>
+          <a:ln>
+            <a:noFill/>
+          </a:ln>
+          <a:effectLst/>
+        </p:spPr>
+        <p:style>
+          <a:lnRef idx="1">
+            <a:schemeClr val="accent1"/>
+          </a:lnRef>
+          <a:fillRef idx="3">
+            <a:schemeClr val="accent1"/>
+          </a:fillRef>
+          <a:effectRef idx="2">
+            <a:schemeClr val="accent1"/>
+          </a:effectRef>
+          <a:fontRef idx="minor">
+            <a:schemeClr val="lt1"/>
+          </a:fontRef>
+        </p:style>
+        <p:txBody>
+          <a:bodyPr rtlCol="0" anchor="ctr"/>
+          <a:lstStyle/>
+          <a:p>
+            <a:pPr algn="ctr"/>
+          </a:p>
+        </p:txBody>
+      </p:sp>
+      <p:sp>
+        <p:nvSpPr>
+          <p:cNvPr id="5" name="Rectangle 4"/>
+          <p:cNvSpPr/>
+          <p:nvPr/>
+        </p:nvSpPr>
+        <p:spPr>
+          <a:xfrm>
+            <a:off x="640080" y="1627632"/>
+            <a:ext cx="5303520" cy="1463040"/>
+          </a:xfrm>
+          <a:prstGeom prst="rect">
+            <a:avLst/>
+          </a:prstGeom>
+          <a:solidFill>
+            <a:srgbClr val="F6F7F4"/>
+          </a:solidFill>
+          <a:ln w="12700">
+            <a:solidFill>
+              <a:srgbClr val="DDE2D8"/>
+            </a:solidFill>
+          </a:ln>
+          <a:effectLst/>
+        </p:spPr>
+        <p:style>
+          <a:lnRef idx="1">
+            <a:schemeClr val="accent1"/>
+          </a:lnRef>
+          <a:fillRef idx="3">
+            <a:schemeClr val="accent1"/>
+          </a:fillRef>
+          <a:effectRef idx="2">
+            <a:schemeClr val="accent1"/>
+          </a:effectRef>
+          <a:fontRef idx="minor">
+            <a:schemeClr val="lt1"/>
+          </a:fontRef>
+        </p:style>
+        <p:txBody>
+          <a:bodyPr rtlCol="0" anchor="ctr"/>
+          <a:lstStyle/>
+          <a:p/>
+        </p:txBody>
+      </p:sp>
+      <p:sp>
+        <p:nvSpPr>
+          <p:cNvPr id="6" name="Rectangle 5"/>
+          <p:cNvSpPr/>
+          <p:nvPr/>
+        </p:nvSpPr>
+        <p:spPr>
+          <a:xfrm>
+            <a:off x="640080" y="1627632"/>
+            <a:ext cx="50292" cy="1463040"/>
+          </a:xfrm>
+          <a:prstGeom prst="rect">
+            <a:avLst/>
+          </a:prstGeom>
+          <a:solidFill>
+            <a:srgbClr val="6A4C93"/>
+          </a:solidFill>
+          <a:ln>
+            <a:noFill/>
+          </a:ln>
+          <a:effectLst/>
+        </p:spPr>
+        <p:style>
+          <a:lnRef idx="1">
+            <a:schemeClr val="accent1"/>
+          </a:lnRef>
+          <a:fillRef idx="3">
+            <a:schemeClr val="accent1"/>
+          </a:fillRef>
+          <a:effectRef idx="2">
+            <a:schemeClr val="accent1"/>
+          </a:effectRef>
+          <a:fontRef idx="minor">
+            <a:schemeClr val="lt1"/>
+          </a:fontRef>
+        </p:style>
+        <p:txBody>
+          <a:bodyPr rtlCol="0" anchor="ctr"/>
+          <a:lstStyle/>
+          <a:p>
+            <a:pPr algn="ctr"/>
+          </a:p>
+        </p:txBody>
+      </p:sp>
+      <p:sp>
+        <p:nvSpPr>
+          <p:cNvPr id="7" name="TextBox 6"/>
+          <p:cNvSpPr txBox="1"/>
+          <p:nvPr/>
+        </p:nvSpPr>
+        <p:spPr>
+          <a:xfrm>
+            <a:off x="896112" y="1773936"/>
+            <a:ext cx="4892040" cy="320040"/>
+          </a:xfrm>
+          <a:prstGeom prst="rect">
+            <a:avLst/>
+          </a:prstGeom>
+          <a:noFill/>
+        </p:spPr>
+        <p:txBody>
+          <a:bodyPr wrap="square" anchor="t">
+            <a:spAutoFit/>
+          </a:bodyPr>
+          <a:lstStyle/>
+          <a:p>
+            <a:pPr algn="l"/>
+            <a:r>
+              <a:rPr sz="1200" b="1">
+                <a:solidFill>
+                  <a:srgbClr val="8A9098"/>
+                </a:solidFill>
+                <a:latin typeface="Calibri"/>
+              </a:rPr>
+              <a:t>HÍBRIDO · FUSIÓN TARDÍA</a:t>
+            </a:r>
+          </a:p>
+        </p:txBody>
+      </p:sp>
+      <p:sp>
+        <p:nvSpPr>
+          <p:cNvPr id="8" name="TextBox 7"/>
+          <p:cNvSpPr txBox="1"/>
+          <p:nvPr/>
+        </p:nvSpPr>
+        <p:spPr>
+          <a:xfrm>
+            <a:off x="896112" y="2103120"/>
+            <a:ext cx="4892040" cy="566928"/>
+          </a:xfrm>
+          <a:prstGeom prst="rect">
+            <a:avLst/>
+          </a:prstGeom>
+          <a:noFill/>
+        </p:spPr>
+        <p:txBody>
+          <a:bodyPr wrap="square" anchor="t">
+            <a:spAutoFit/>
+          </a:bodyPr>
+          <a:lstStyle/>
+          <a:p>
+            <a:pPr algn="l"/>
+            <a:r>
+              <a:rPr sz="3000" b="1">
+                <a:solidFill>
+                  <a:srgbClr val="6A4C93"/>
+                </a:solidFill>
+                <a:latin typeface="Calibri"/>
+              </a:rPr>
+              <a:t>QWK 0.941</a:t>
+            </a:r>
+          </a:p>
+        </p:txBody>
+      </p:sp>
+      <p:sp>
+        <p:nvSpPr>
+          <p:cNvPr id="9" name="TextBox 8"/>
+          <p:cNvSpPr txBox="1"/>
+          <p:nvPr/>
+        </p:nvSpPr>
+        <p:spPr>
+          <a:xfrm>
+            <a:off x="896112" y="2523744"/>
+            <a:ext cx="4892040" cy="457200"/>
+          </a:xfrm>
+          <a:prstGeom prst="rect">
+            <a:avLst/>
+          </a:prstGeom>
+          <a:noFill/>
+        </p:spPr>
+        <p:txBody>
+          <a:bodyPr wrap="square" anchor="t">
+            <a:spAutoFit/>
+          </a:bodyPr>
+          <a:lstStyle/>
+          <a:p>
+            <a:pPr algn="l"/>
+            <a:r>
+              <a:rPr sz="1100" b="0">
+                <a:solidFill>
+                  <a:srgbClr val="8A9098"/>
+                </a:solidFill>
+                <a:latin typeface="Calibri"/>
+              </a:rPr>
+              <a:t>46.4 M params · 16.7 GFLOPs · acc 76.7 %</a:t>
+            </a:r>
+          </a:p>
+        </p:txBody>
+      </p:sp>
+      <p:sp>
+        <p:nvSpPr>
+          <p:cNvPr id="10" name="Rectangle 9"/>
+          <p:cNvSpPr/>
+          <p:nvPr/>
+        </p:nvSpPr>
+        <p:spPr>
+          <a:xfrm>
+            <a:off x="6217920" y="1627632"/>
+            <a:ext cx="5303520" cy="1463040"/>
+          </a:xfrm>
+          <a:prstGeom prst="rect">
+            <a:avLst/>
+          </a:prstGeom>
+          <a:solidFill>
+            <a:srgbClr val="F6F7F4"/>
+          </a:solidFill>
+          <a:ln w="12700">
+            <a:solidFill>
+              <a:srgbClr val="DDE2D8"/>
+            </a:solidFill>
+          </a:ln>
+          <a:effectLst/>
+        </p:spPr>
+        <p:style>
+          <a:lnRef idx="1">
+            <a:schemeClr val="accent1"/>
+          </a:lnRef>
+          <a:fillRef idx="3">
+            <a:schemeClr val="accent1"/>
+          </a:fillRef>
+          <a:effectRef idx="2">
+            <a:schemeClr val="accent1"/>
+          </a:effectRef>
+          <a:fontRef idx="minor">
+            <a:schemeClr val="lt1"/>
+          </a:fontRef>
+        </p:style>
+        <p:txBody>
+          <a:bodyPr rtlCol="0" anchor="ctr"/>
+          <a:lstStyle/>
+          <a:p/>
+        </p:txBody>
+      </p:sp>
+      <p:sp>
+        <p:nvSpPr>
+          <p:cNvPr id="11" name="Rectangle 10"/>
+          <p:cNvSpPr/>
+          <p:nvPr/>
+        </p:nvSpPr>
+        <p:spPr>
+          <a:xfrm>
+            <a:off x="6217920" y="1627632"/>
+            <a:ext cx="50292" cy="1463040"/>
+          </a:xfrm>
+          <a:prstGeom prst="rect">
+            <a:avLst/>
+          </a:prstGeom>
+          <a:solidFill>
+            <a:srgbClr val="6A4C93"/>
+          </a:solidFill>
+          <a:ln>
+            <a:noFill/>
+          </a:ln>
+          <a:effectLst/>
+        </p:spPr>
+        <p:style>
+          <a:lnRef idx="1">
+            <a:schemeClr val="accent1"/>
+          </a:lnRef>
+          <a:fillRef idx="3">
+            <a:schemeClr val="accent1"/>
+          </a:fillRef>
+          <a:effectRef idx="2">
+            <a:schemeClr val="accent1"/>
+          </a:effectRef>
+          <a:fontRef idx="minor">
+            <a:schemeClr val="lt1"/>
+          </a:fontRef>
+        </p:style>
+        <p:txBody>
+          <a:bodyPr rtlCol="0" anchor="ctr"/>
+          <a:lstStyle/>
+          <a:p>
+            <a:pPr algn="ctr"/>
+          </a:p>
+        </p:txBody>
+      </p:sp>
+      <p:sp>
+        <p:nvSpPr>
+          <p:cNvPr id="12" name="TextBox 11"/>
+          <p:cNvSpPr txBox="1"/>
+          <p:nvPr/>
+        </p:nvSpPr>
+        <p:spPr>
+          <a:xfrm>
+            <a:off x="6473952" y="1773936"/>
+            <a:ext cx="4892040" cy="320040"/>
+          </a:xfrm>
+          <a:prstGeom prst="rect">
+            <a:avLst/>
+          </a:prstGeom>
+          <a:noFill/>
+        </p:spPr>
+        <p:txBody>
+          <a:bodyPr wrap="square" anchor="t">
+            <a:spAutoFit/>
+          </a:bodyPr>
+          <a:lstStyle/>
+          <a:p>
+            <a:pPr algn="l"/>
+            <a:r>
+              <a:rPr sz="1200" b="1">
+                <a:solidFill>
+                  <a:srgbClr val="8A9098"/>
+                </a:solidFill>
+                <a:latin typeface="Calibri"/>
+              </a:rPr>
+              <a:t>VIT-HYBRID R26+S/32</a:t>
+            </a:r>
+          </a:p>
+        </p:txBody>
+      </p:sp>
+      <p:sp>
+        <p:nvSpPr>
+          <p:cNvPr id="13" name="TextBox 12"/>
+          <p:cNvSpPr txBox="1"/>
+          <p:nvPr/>
+        </p:nvSpPr>
+        <p:spPr>
+          <a:xfrm>
+            <a:off x="6473952" y="2103120"/>
+            <a:ext cx="4892040" cy="566928"/>
+          </a:xfrm>
+          <a:prstGeom prst="rect">
+            <a:avLst/>
+          </a:prstGeom>
+          <a:noFill/>
+        </p:spPr>
+        <p:txBody>
+          <a:bodyPr wrap="square" anchor="t">
+            <a:spAutoFit/>
+          </a:bodyPr>
+          <a:lstStyle/>
+          <a:p>
+            <a:pPr algn="l"/>
+            <a:r>
+              <a:rPr sz="3000" b="1">
+                <a:solidFill>
+                  <a:srgbClr val="6A4C93"/>
+                </a:solidFill>
+                <a:latin typeface="Calibri"/>
+              </a:rPr>
+              <a:t>QWK 0.941</a:t>
+            </a:r>
+          </a:p>
+        </p:txBody>
+      </p:sp>
+      <p:sp>
+        <p:nvSpPr>
+          <p:cNvPr id="14" name="TextBox 13"/>
+          <p:cNvSpPr txBox="1"/>
+          <p:nvPr/>
+        </p:nvSpPr>
+        <p:spPr>
+          <a:xfrm>
+            <a:off x="6473952" y="2523744"/>
+            <a:ext cx="4892040" cy="457200"/>
+          </a:xfrm>
+          <a:prstGeom prst="rect">
+            <a:avLst/>
+          </a:prstGeom>
+          <a:noFill/>
+        </p:spPr>
+        <p:txBody>
+          <a:bodyPr wrap="square" anchor="t">
+            <a:spAutoFit/>
+          </a:bodyPr>
+          <a:lstStyle/>
+          <a:p>
+            <a:pPr algn="l"/>
+            <a:r>
+              <a:rPr sz="1100" b="0">
+                <a:solidFill>
+                  <a:srgbClr val="8A9098"/>
+                </a:solidFill>
+                <a:latin typeface="Calibri"/>
+              </a:rPr>
+              <a:t>36.0 M params · 6.9 GFLOPs · acc 76.2 %</a:t>
+            </a:r>
+          </a:p>
+        </p:txBody>
+      </p:sp>
+      <p:sp>
+        <p:nvSpPr>
+          <p:cNvPr id="15" name="TextBox 14"/>
+          <p:cNvSpPr txBox="1"/>
+          <p:nvPr/>
+        </p:nvSpPr>
+        <p:spPr>
+          <a:xfrm>
+            <a:off x="640080" y="3410712"/>
+            <a:ext cx="5669280" cy="4206240"/>
+          </a:xfrm>
+          <a:prstGeom prst="rect">
+            <a:avLst/>
+          </a:prstGeom>
+          <a:noFill/>
+        </p:spPr>
+        <p:txBody>
+          <a:bodyPr wrap="square">
+            <a:spAutoFit/>
+          </a:bodyPr>
+          <a:lstStyle/>
+          <a:p>
+            <a:pPr>
+              <a:spcAft>
+                <a:spcPts val="1300"/>
+              </a:spcAft>
+            </a:pPr>
+            <a:r>
+              <a:rPr sz="1250" b="1">
+                <a:solidFill>
+                  <a:srgbClr val="8FB339"/>
+                </a:solidFill>
+              </a:rPr>
+              <a:t>▪  </a:t>
+            </a:r>
+            <a:r>
+              <a:rPr sz="1250" b="0">
+                <a:solidFill>
+                  <a:srgbClr val="444A52"/>
+                </a:solidFill>
+              </a:rPr>
+              <a:t>Techo de un oráculo que eligiera siempre el modelo correcto: 82.0 %. Ambos fallan a la vez en 18.0 % de las imágenes.</a:t>
+            </a:r>
+          </a:p>
+          <a:p>
+            <a:pPr>
+              <a:spcAft>
+                <a:spcPts val="1300"/>
+              </a:spcAft>
+            </a:pPr>
+            <a:r>
+              <a:rPr sz="1250" b="1">
+                <a:solidFill>
+                  <a:srgbClr val="8FB339"/>
+                </a:solidFill>
+              </a:rPr>
+              <a:t>▪  </a:t>
+            </a:r>
+            <a:r>
+              <a:rPr sz="1250" b="1">
+                <a:solidFill>
+                  <a:srgbClr val="444A52"/>
+                </a:solidFill>
+              </a:rPr>
+              <a:t>La fusión tardía cuesta el doble de cómputo por imagen.</a:t>
+            </a:r>
+          </a:p>
+          <a:p>
+            <a:pPr>
+              <a:spcAft>
+                <a:spcPts val="1300"/>
+              </a:spcAft>
+            </a:pPr>
+            <a:r>
+              <a:rPr sz="1250" b="1">
+                <a:solidFill>
+                  <a:srgbClr val="8FB339"/>
+                </a:solidFill>
+              </a:rPr>
+              <a:t>▪  </a:t>
+            </a:r>
+            <a:r>
+              <a:rPr sz="1250" b="0">
+                <a:solidFill>
+                  <a:srgbClr val="444A52"/>
+                </a:solidFill>
+              </a:rPr>
+              <a:t>Dos backbones completos en el forward. La pregunta no es si mejora, sino si mejora lo suficiente para justificar 2× de latencia.</a:t>
+            </a:r>
+          </a:p>
+          <a:p>
+            <a:pPr>
+              <a:spcAft>
+                <a:spcPts val="1300"/>
+              </a:spcAft>
+            </a:pPr>
+            <a:r>
+              <a:rPr sz="1250" b="1">
+                <a:solidFill>
+                  <a:srgbClr val="8FB339"/>
+                </a:solidFill>
+              </a:rPr>
+              <a:t>▪  </a:t>
+            </a:r>
+            <a:r>
+              <a:rPr sz="1250" b="0">
+                <a:solidFill>
+                  <a:srgbClr val="444A52"/>
+                </a:solidFill>
+              </a:rPr>
+              <a:t>El ViT-Hybrid R26 no es equiparable: 36 M de parámetros y pesos de ImageNet-21k. Va como cota superior de referencia, no como competidor.</a:t>
+            </a:r>
+          </a:p>
+        </p:txBody>
+      </p:sp>
+      <p:pic>
+        <p:nvPicPr>
+          <p:cNvPr id="16" name="Picture 15" descr="13_costo_beneficio_final.png"/>
+          <p:cNvPicPr>
+            <a:picLocks noChangeAspect="1"/>
+          </p:cNvPicPr>
+          <p:nvPr/>
+        </p:nvPicPr>
+        <p:blipFill>
+          <a:blip r:embed="rId2"/>
+          <a:stretch>
+            <a:fillRect/>
+          </a:stretch>
+        </p:blipFill>
+        <p:spPr>
+          <a:xfrm>
+            <a:off x="6492240" y="3547872"/>
+            <a:ext cx="4625027" cy="2194560"/>
+          </a:xfrm>
+          <a:prstGeom prst="rect">
+            <a:avLst/>
+          </a:prstGeom>
+        </p:spPr>
+      </p:pic>
+      <p:sp>
+        <p:nvSpPr>
+          <p:cNvPr id="17" name="TextBox 16"/>
+          <p:cNvSpPr txBox="1"/>
+          <p:nvPr/>
+        </p:nvSpPr>
+        <p:spPr>
+          <a:xfrm>
+            <a:off x="11140135" y="6355080"/>
+            <a:ext cx="640080" cy="320040"/>
+          </a:xfrm>
+          <a:prstGeom prst="rect">
+            <a:avLst/>
+          </a:prstGeom>
+          <a:noFill/>
+        </p:spPr>
+        <p:txBody>
+          <a:bodyPr wrap="square" anchor="t">
+            <a:spAutoFit/>
+          </a:bodyPr>
+          <a:lstStyle/>
+          <a:p>
+            <a:pPr algn="r"/>
+            <a:r>
+              <a:rPr sz="1100" b="0">
+                <a:solidFill>
+                  <a:srgbClr val="8A9098"/>
+                </a:solidFill>
+                <a:latin typeface="Calibri"/>
+              </a:rPr>
+              <a:t>11/15</a:t>
+            </a:r>
+          </a:p>
+        </p:txBody>
+      </p:sp>
+    </p:spTree>
+  </p:cSld>
+  <p:clrMapOvr>
+    <a:masterClrMapping/>
+  </p:clrMapOvr>
+</p:sld>
+</file>
+
+<file path=ppt/slides/slide12.xml><?xml version="1.0" encoding="utf-8"?>
+<p:sld xmlns:a="http://schemas.openxmlformats.org/drawingml/2006/main" xmlns:p="http://schemas.openxmlformats.org/presentationml/2006/main" xmlns:r="http://schemas.openxmlformats.org/officeDocument/2006/relationships">
+  <p:cSld>
+    <p:spTree>
+      <p:nvGrpSpPr>
+        <p:cNvPr id="1" name=""/>
+        <p:cNvGrpSpPr/>
+        <p:nvPr/>
+      </p:nvGrpSpPr>
+      <p:grpSpPr/>
+      <p:sp>
+        <p:nvSpPr>
+          <p:cNvPr id="2" name="TextBox 1"/>
+          <p:cNvSpPr txBox="1"/>
+          <p:nvPr/>
+        </p:nvSpPr>
+        <p:spPr>
+          <a:xfrm>
+            <a:off x="640080" y="384048"/>
+            <a:ext cx="10972800" cy="685800"/>
+          </a:xfrm>
+          <a:prstGeom prst="rect">
+            <a:avLst/>
+          </a:prstGeom>
+          <a:noFill/>
+        </p:spPr>
+        <p:txBody>
+          <a:bodyPr wrap="square" anchor="t">
+            <a:spAutoFit/>
+          </a:bodyPr>
+          <a:lstStyle/>
+          <a:p>
+            <a:pPr algn="l"/>
+            <a:r>
+              <a:rPr sz="3000" b="1">
+                <a:solidFill>
+                  <a:srgbClr val="2E6B2F"/>
+                </a:solidFill>
+                <a:latin typeface="Calibri"/>
+              </a:rPr>
+              <a:t>Dónde mira cada arquitectura</a:t>
+            </a:r>
+          </a:p>
+        </p:txBody>
+      </p:sp>
+      <p:sp>
+        <p:nvSpPr>
+          <p:cNvPr id="3" name="TextBox 2"/>
+          <p:cNvSpPr txBox="1"/>
+          <p:nvPr/>
+        </p:nvSpPr>
+        <p:spPr>
+          <a:xfrm>
+            <a:off x="640080" y="1078992"/>
+            <a:ext cx="10972800" cy="457200"/>
+          </a:xfrm>
+          <a:prstGeom prst="rect">
+            <a:avLst/>
+          </a:prstGeom>
+          <a:noFill/>
+        </p:spPr>
+        <p:txBody>
+          <a:bodyPr wrap="square" anchor="t">
+            <a:spAutoFit/>
+          </a:bodyPr>
+          <a:lstStyle/>
+          <a:p>
+            <a:pPr algn="l"/>
+            <a:r>
+              <a:rPr sz="1500" b="0">
+                <a:solidFill>
+                  <a:srgbClr val="8A9098"/>
+                </a:solidFill>
+                <a:latin typeface="Calibri"/>
+              </a:rPr>
+              <a:t>Grad-CAM en la ResNet · attention rollout en el ViT</a:t>
+            </a:r>
+          </a:p>
+        </p:txBody>
+      </p:sp>
+      <p:sp>
+        <p:nvSpPr>
+          <p:cNvPr id="4" name="Rectangle 3"/>
+          <p:cNvSpPr/>
+          <p:nvPr/>
+        </p:nvSpPr>
+        <p:spPr>
+          <a:xfrm>
+            <a:off x="640080" y="1024128"/>
+            <a:ext cx="1371600" cy="32004"/>
+          </a:xfrm>
+          <a:prstGeom prst="rect">
+            <a:avLst/>
+          </a:prstGeom>
+          <a:solidFill>
+            <a:srgbClr val="8FB339"/>
+          </a:solidFill>
+          <a:ln>
+            <a:noFill/>
+          </a:ln>
+          <a:effectLst/>
+        </p:spPr>
+        <p:style>
+          <a:lnRef idx="1">
+            <a:schemeClr val="accent1"/>
+          </a:lnRef>
+          <a:fillRef idx="3">
+            <a:schemeClr val="accent1"/>
+          </a:fillRef>
+          <a:effectRef idx="2">
+            <a:schemeClr val="accent1"/>
+          </a:effectRef>
+          <a:fontRef idx="minor">
+            <a:schemeClr val="lt1"/>
+          </a:fontRef>
+        </p:style>
+        <p:txBody>
+          <a:bodyPr rtlCol="0" anchor="ctr"/>
+          <a:lstStyle/>
+          <a:p>
+            <a:pPr algn="ctr"/>
+          </a:p>
+        </p:txBody>
+      </p:sp>
       <p:pic>
         <p:nvPicPr>
           <p:cNvPr id="5" name="Picture 4" descr="20_interpretabilidad_desacuerdo.png"/>
@@ -3641,7 +5134,7 @@
                 </a:solidFill>
                 <a:latin typeface="Calibri"/>
               </a:rPr>
-              <a:t>10/13</a:t>
+              <a:t>12/15</a:t>
             </a:r>
           </a:p>
         </p:txBody>
@@ -3654,7 +5147,7 @@
 </p:sld>
 </file>
 
-<file path=ppt/slides/slide11.xml><?xml version="1.0" encoding="utf-8"?>
+<file path=ppt/slides/slide13.xml><?xml version="1.0" encoding="utf-8"?>
 <p:sld xmlns:a="http://schemas.openxmlformats.org/drawingml/2006/main" xmlns:p="http://schemas.openxmlformats.org/presentationml/2006/main" xmlns:r="http://schemas.openxmlformats.org/officeDocument/2006/relationships">
   <p:cSld>
     <p:spTree>
@@ -4653,7 +6146,7 @@
                 </a:solidFill>
                 <a:latin typeface="Calibri"/>
               </a:rPr>
-              <a:t>11/13</a:t>
+              <a:t>13/15</a:t>
             </a:r>
           </a:p>
         </p:txBody>
@@ -4666,7 +6159,7 @@
 </p:sld>
 </file>
 
-<file path=ppt/slides/slide12.xml><?xml version="1.0" encoding="utf-8"?>
+<file path=ppt/slides/slide14.xml><?xml version="1.0" encoding="utf-8"?>
 <p:sld xmlns:a="http://schemas.openxmlformats.org/drawingml/2006/main" xmlns:p="http://schemas.openxmlformats.org/presentationml/2006/main" xmlns:r="http://schemas.openxmlformats.org/officeDocument/2006/relationships">
   <p:cSld>
     <p:spTree>
@@ -5060,7 +6553,7 @@
                 </a:solidFill>
                 <a:latin typeface="Calibri"/>
               </a:rPr>
-              <a:t>12/13</a:t>
+              <a:t>14/15</a:t>
             </a:r>
           </a:p>
         </p:txBody>
@@ -5073,7 +6566,7 @@
 </p:sld>
 </file>
 
-<file path=ppt/slides/slide13.xml><?xml version="1.0" encoding="utf-8"?>
+<file path=ppt/slides/slide15.xml><?xml version="1.0" encoding="utf-8"?>
 <p:sld xmlns:a="http://schemas.openxmlformats.org/drawingml/2006/main" xmlns:p="http://schemas.openxmlformats.org/presentationml/2006/main" xmlns:r="http://schemas.openxmlformats.org/officeDocument/2006/relationships">
   <p:cSld>
     <p:spTree>
@@ -5432,7 +6925,7 @@
                 </a:solidFill>
                 <a:latin typeface="Calibri"/>
               </a:rPr>
-              <a:t>13/13</a:t>
+              <a:t>15/15</a:t>
             </a:r>
           </a:p>
         </p:txBody>
@@ -6269,7 +7762,7 @@
                 </a:solidFill>
                 <a:latin typeface="Calibri"/>
               </a:rPr>
-              <a:t>2/13</a:t>
+              <a:t>2/15</a:t>
             </a:r>
           </a:p>
         </p:txBody>
@@ -7448,7 +8941,7 @@
                 </a:solidFill>
                 <a:latin typeface="Calibri"/>
               </a:rPr>
-              <a:t>3/13</a:t>
+              <a:t>3/15</a:t>
             </a:r>
           </a:p>
         </p:txBody>
@@ -7462,6 +8955,1108 @@
 </file>
 
 <file path=ppt/slides/slide4.xml><?xml version="1.0" encoding="utf-8"?>
+<p:sld xmlns:a="http://schemas.openxmlformats.org/drawingml/2006/main" xmlns:p="http://schemas.openxmlformats.org/presentationml/2006/main" xmlns:r="http://schemas.openxmlformats.org/officeDocument/2006/relationships">
+  <p:cSld>
+    <p:spTree>
+      <p:nvGrpSpPr>
+        <p:cNvPr id="1" name=""/>
+        <p:cNvGrpSpPr/>
+        <p:nvPr/>
+      </p:nvGrpSpPr>
+      <p:grpSpPr/>
+      <p:sp>
+        <p:nvSpPr>
+          <p:cNvPr id="2" name="TextBox 1"/>
+          <p:cNvSpPr txBox="1"/>
+          <p:nvPr/>
+        </p:nvSpPr>
+        <p:spPr>
+          <a:xfrm>
+            <a:off x="640080" y="384048"/>
+            <a:ext cx="10972800" cy="685800"/>
+          </a:xfrm>
+          <a:prstGeom prst="rect">
+            <a:avLst/>
+          </a:prstGeom>
+          <a:noFill/>
+        </p:spPr>
+        <p:txBody>
+          <a:bodyPr wrap="square" anchor="t">
+            <a:spAutoFit/>
+          </a:bodyPr>
+          <a:lstStyle/>
+          <a:p>
+            <a:pPr algn="l"/>
+            <a:r>
+              <a:rPr sz="3000" b="1">
+                <a:solidFill>
+                  <a:srgbClr val="2E6B2F"/>
+                </a:solidFill>
+                <a:latin typeface="Calibri"/>
+              </a:rPr>
+              <a:t>Las dos redes, en una imagen</a:t>
+            </a:r>
+          </a:p>
+        </p:txBody>
+      </p:sp>
+      <p:sp>
+        <p:nvSpPr>
+          <p:cNvPr id="3" name="TextBox 2"/>
+          <p:cNvSpPr txBox="1"/>
+          <p:nvPr/>
+        </p:nvSpPr>
+        <p:spPr>
+          <a:xfrm>
+            <a:off x="640080" y="1078992"/>
+            <a:ext cx="10972800" cy="457200"/>
+          </a:xfrm>
+          <a:prstGeom prst="rect">
+            <a:avLst/>
+          </a:prstGeom>
+          <a:noFill/>
+        </p:spPr>
+        <p:txBody>
+          <a:bodyPr wrap="square" anchor="t">
+            <a:spAutoFit/>
+          </a:bodyPr>
+          <a:lstStyle/>
+          <a:p>
+            <a:pPr algn="l"/>
+            <a:r>
+              <a:rPr sz="1500" b="0">
+                <a:solidFill>
+                  <a:srgbClr val="8A9098"/>
+                </a:solidFill>
+                <a:latin typeface="Calibri"/>
+              </a:rPr>
+              <a:t>La diferencia es CÓMO miran la foto</a:t>
+            </a:r>
+          </a:p>
+        </p:txBody>
+      </p:sp>
+      <p:sp>
+        <p:nvSpPr>
+          <p:cNvPr id="4" name="Rectangle 3"/>
+          <p:cNvSpPr/>
+          <p:nvPr/>
+        </p:nvSpPr>
+        <p:spPr>
+          <a:xfrm>
+            <a:off x="640080" y="1024128"/>
+            <a:ext cx="1371600" cy="32004"/>
+          </a:xfrm>
+          <a:prstGeom prst="rect">
+            <a:avLst/>
+          </a:prstGeom>
+          <a:solidFill>
+            <a:srgbClr val="8FB339"/>
+          </a:solidFill>
+          <a:ln>
+            <a:noFill/>
+          </a:ln>
+          <a:effectLst/>
+        </p:spPr>
+        <p:style>
+          <a:lnRef idx="1">
+            <a:schemeClr val="accent1"/>
+          </a:lnRef>
+          <a:fillRef idx="3">
+            <a:schemeClr val="accent1"/>
+          </a:fillRef>
+          <a:effectRef idx="2">
+            <a:schemeClr val="accent1"/>
+          </a:effectRef>
+          <a:fontRef idx="minor">
+            <a:schemeClr val="lt1"/>
+          </a:fontRef>
+        </p:style>
+        <p:txBody>
+          <a:bodyPr rtlCol="0" anchor="ctr"/>
+          <a:lstStyle/>
+          <a:p>
+            <a:pPr algn="ctr"/>
+          </a:p>
+        </p:txBody>
+      </p:sp>
+      <p:pic>
+        <p:nvPicPr>
+          <p:cNvPr id="5" name="Picture 4" descr="30_como_mira_cada_red.png"/>
+          <p:cNvPicPr>
+            <a:picLocks noChangeAspect="1"/>
+          </p:cNvPicPr>
+          <p:nvPr/>
+        </p:nvPicPr>
+        <p:blipFill>
+          <a:blip r:embed="rId2"/>
+          <a:stretch>
+            <a:fillRect/>
+          </a:stretch>
+        </p:blipFill>
+        <p:spPr>
+          <a:xfrm>
+            <a:off x="3140247" y="1627632"/>
+            <a:ext cx="5911201" cy="3017520"/>
+          </a:xfrm>
+          <a:prstGeom prst="rect">
+            <a:avLst/>
+          </a:prstGeom>
+        </p:spPr>
+      </p:pic>
+      <p:sp>
+        <p:nvSpPr>
+          <p:cNvPr id="6" name="TextBox 5"/>
+          <p:cNvSpPr txBox="1"/>
+          <p:nvPr/>
+        </p:nvSpPr>
+        <p:spPr>
+          <a:xfrm>
+            <a:off x="731520" y="4873752"/>
+            <a:ext cx="5029200" cy="4206240"/>
+          </a:xfrm>
+          <a:prstGeom prst="rect">
+            <a:avLst/>
+          </a:prstGeom>
+          <a:noFill/>
+        </p:spPr>
+        <p:txBody>
+          <a:bodyPr wrap="square">
+            <a:spAutoFit/>
+          </a:bodyPr>
+          <a:lstStyle/>
+          <a:p>
+            <a:pPr>
+              <a:spcAft>
+                <a:spcPts val="1300"/>
+              </a:spcAft>
+            </a:pPr>
+            <a:r>
+              <a:rPr sz="1200" b="1">
+                <a:solidFill>
+                  <a:srgbClr val="8FB339"/>
+                </a:solidFill>
+              </a:rPr>
+              <a:t>▪  </a:t>
+            </a:r>
+            <a:r>
+              <a:rPr sz="1200" b="0">
+                <a:solidFill>
+                  <a:srgbClr val="444A52"/>
+                </a:solidFill>
+              </a:rPr>
+              <a:t>Va de a pedacitos y reutiliza el mismo detector en toda la foto (convolución).</a:t>
+            </a:r>
+          </a:p>
+          <a:p>
+            <a:pPr>
+              <a:spcAft>
+                <a:spcPts val="1300"/>
+              </a:spcAft>
+            </a:pPr>
+            <a:r>
+              <a:rPr sz="1200" b="1">
+                <a:solidFill>
+                  <a:srgbClr val="8FB339"/>
+                </a:solidFill>
+              </a:rPr>
+              <a:t>▪  </a:t>
+            </a:r>
+            <a:r>
+              <a:rPr sz="1200" b="0">
+                <a:solidFill>
+                  <a:srgbClr val="444A52"/>
+                </a:solidFill>
+              </a:rPr>
+              <a:t>Buena para detalles: manchas, arrugas, tono.</a:t>
+            </a:r>
+          </a:p>
+        </p:txBody>
+      </p:sp>
+      <p:sp>
+        <p:nvSpPr>
+          <p:cNvPr id="7" name="TextBox 6"/>
+          <p:cNvSpPr txBox="1"/>
+          <p:nvPr/>
+        </p:nvSpPr>
+        <p:spPr>
+          <a:xfrm>
+            <a:off x="6309360" y="4873752"/>
+            <a:ext cx="5120640" cy="4206240"/>
+          </a:xfrm>
+          <a:prstGeom prst="rect">
+            <a:avLst/>
+          </a:prstGeom>
+          <a:noFill/>
+        </p:spPr>
+        <p:txBody>
+          <a:bodyPr wrap="square">
+            <a:spAutoFit/>
+          </a:bodyPr>
+          <a:lstStyle/>
+          <a:p>
+            <a:pPr>
+              <a:spcAft>
+                <a:spcPts val="1300"/>
+              </a:spcAft>
+            </a:pPr>
+            <a:r>
+              <a:rPr sz="1200" b="1">
+                <a:solidFill>
+                  <a:srgbClr val="8FB339"/>
+                </a:solidFill>
+              </a:rPr>
+              <a:t>▪  </a:t>
+            </a:r>
+            <a:r>
+              <a:rPr sz="1200" b="0">
+                <a:solidFill>
+                  <a:srgbClr val="444A52"/>
+                </a:solidFill>
+              </a:rPr>
+              <a:t>Parte la foto en 196 cuadraditos y los compara todos contra todos (auto-atención).</a:t>
+            </a:r>
+          </a:p>
+          <a:p>
+            <a:pPr>
+              <a:spcAft>
+                <a:spcPts val="1300"/>
+              </a:spcAft>
+            </a:pPr>
+            <a:r>
+              <a:rPr sz="1200" b="1">
+                <a:solidFill>
+                  <a:srgbClr val="8FB339"/>
+                </a:solidFill>
+              </a:rPr>
+              <a:t>▪  </a:t>
+            </a:r>
+            <a:r>
+              <a:rPr sz="1200" b="0">
+                <a:solidFill>
+                  <a:srgbClr val="444A52"/>
+                </a:solidFill>
+              </a:rPr>
+              <a:t>Buena para relacionar zonas distantes.</a:t>
+            </a:r>
+          </a:p>
+        </p:txBody>
+      </p:sp>
+      <p:sp>
+        <p:nvSpPr>
+          <p:cNvPr id="8" name="Rectangle 7"/>
+          <p:cNvSpPr/>
+          <p:nvPr/>
+        </p:nvSpPr>
+        <p:spPr>
+          <a:xfrm>
+            <a:off x="640080" y="6144768"/>
+            <a:ext cx="45720" cy="384048"/>
+          </a:xfrm>
+          <a:prstGeom prst="rect">
+            <a:avLst/>
+          </a:prstGeom>
+          <a:solidFill>
+            <a:srgbClr val="8FB339"/>
+          </a:solidFill>
+          <a:ln>
+            <a:noFill/>
+          </a:ln>
+          <a:effectLst/>
+        </p:spPr>
+        <p:style>
+          <a:lnRef idx="1">
+            <a:schemeClr val="accent1"/>
+          </a:lnRef>
+          <a:fillRef idx="3">
+            <a:schemeClr val="accent1"/>
+          </a:fillRef>
+          <a:effectRef idx="2">
+            <a:schemeClr val="accent1"/>
+          </a:effectRef>
+          <a:fontRef idx="minor">
+            <a:schemeClr val="lt1"/>
+          </a:fontRef>
+        </p:style>
+        <p:txBody>
+          <a:bodyPr rtlCol="0" anchor="ctr"/>
+          <a:lstStyle/>
+          <a:p>
+            <a:pPr algn="ctr"/>
+          </a:p>
+        </p:txBody>
+      </p:sp>
+      <p:sp>
+        <p:nvSpPr>
+          <p:cNvPr id="9" name="TextBox 8"/>
+          <p:cNvSpPr txBox="1"/>
+          <p:nvPr/>
+        </p:nvSpPr>
+        <p:spPr>
+          <a:xfrm>
+            <a:off x="841248" y="6126480"/>
+            <a:ext cx="10698480" cy="457200"/>
+          </a:xfrm>
+          <a:prstGeom prst="rect">
+            <a:avLst/>
+          </a:prstGeom>
+          <a:noFill/>
+        </p:spPr>
+        <p:txBody>
+          <a:bodyPr wrap="square" anchor="ctr">
+            <a:spAutoFit/>
+          </a:bodyPr>
+          <a:lstStyle/>
+          <a:p>
+            <a:pPr algn="l"/>
+            <a:r>
+              <a:rPr sz="1300" b="0">
+                <a:solidFill>
+                  <a:srgbClr val="8A9098"/>
+                </a:solidFill>
+                <a:latin typeface="Calibri"/>
+              </a:rPr>
+              <a:t>Ninguna se programó desde cero: las dos vienen de timm, la biblioteca estándar de modelos de visión.</a:t>
+            </a:r>
+          </a:p>
+        </p:txBody>
+      </p:sp>
+      <p:sp>
+        <p:nvSpPr>
+          <p:cNvPr id="10" name="TextBox 9"/>
+          <p:cNvSpPr txBox="1"/>
+          <p:nvPr/>
+        </p:nvSpPr>
+        <p:spPr>
+          <a:xfrm>
+            <a:off x="11140135" y="6355080"/>
+            <a:ext cx="640080" cy="320040"/>
+          </a:xfrm>
+          <a:prstGeom prst="rect">
+            <a:avLst/>
+          </a:prstGeom>
+          <a:noFill/>
+        </p:spPr>
+        <p:txBody>
+          <a:bodyPr wrap="square" anchor="t">
+            <a:spAutoFit/>
+          </a:bodyPr>
+          <a:lstStyle/>
+          <a:p>
+            <a:pPr algn="r"/>
+            <a:r>
+              <a:rPr sz="1100" b="0">
+                <a:solidFill>
+                  <a:srgbClr val="8A9098"/>
+                </a:solidFill>
+                <a:latin typeface="Calibri"/>
+              </a:rPr>
+              <a:t>4/15</a:t>
+            </a:r>
+          </a:p>
+        </p:txBody>
+      </p:sp>
+    </p:spTree>
+  </p:cSld>
+  <p:clrMapOvr>
+    <a:masterClrMapping/>
+  </p:clrMapOvr>
+</p:sld>
+</file>
+
+<file path=ppt/slides/slide5.xml><?xml version="1.0" encoding="utf-8"?>
+<p:sld xmlns:a="http://schemas.openxmlformats.org/drawingml/2006/main" xmlns:p="http://schemas.openxmlformats.org/presentationml/2006/main" xmlns:r="http://schemas.openxmlformats.org/officeDocument/2006/relationships">
+  <p:cSld>
+    <p:spTree>
+      <p:nvGrpSpPr>
+        <p:cNvPr id="1" name=""/>
+        <p:cNvGrpSpPr/>
+        <p:nvPr/>
+      </p:nvGrpSpPr>
+      <p:grpSpPr/>
+      <p:sp>
+        <p:nvSpPr>
+          <p:cNvPr id="2" name="TextBox 1"/>
+          <p:cNvSpPr txBox="1"/>
+          <p:nvPr/>
+        </p:nvSpPr>
+        <p:spPr>
+          <a:xfrm>
+            <a:off x="640080" y="384048"/>
+            <a:ext cx="10972800" cy="685800"/>
+          </a:xfrm>
+          <a:prstGeom prst="rect">
+            <a:avLst/>
+          </a:prstGeom>
+          <a:noFill/>
+        </p:spPr>
+        <p:txBody>
+          <a:bodyPr wrap="square" anchor="t">
+            <a:spAutoFit/>
+          </a:bodyPr>
+          <a:lstStyle/>
+          <a:p>
+            <a:pPr algn="l"/>
+            <a:r>
+              <a:rPr sz="3000" b="1">
+                <a:solidFill>
+                  <a:srgbClr val="2E6B2F"/>
+                </a:solidFill>
+                <a:latin typeface="Calibri"/>
+              </a:rPr>
+              <a:t>Por qué entrenan tan distinto</a:t>
+            </a:r>
+          </a:p>
+        </p:txBody>
+      </p:sp>
+      <p:sp>
+        <p:nvSpPr>
+          <p:cNvPr id="3" name="TextBox 2"/>
+          <p:cNvSpPr txBox="1"/>
+          <p:nvPr/>
+        </p:nvSpPr>
+        <p:spPr>
+          <a:xfrm>
+            <a:off x="640080" y="1078992"/>
+            <a:ext cx="10972800" cy="457200"/>
+          </a:xfrm>
+          <a:prstGeom prst="rect">
+            <a:avLst/>
+          </a:prstGeom>
+          <a:noFill/>
+        </p:spPr>
+        <p:txBody>
+          <a:bodyPr wrap="square" anchor="t">
+            <a:spAutoFit/>
+          </a:bodyPr>
+          <a:lstStyle/>
+          <a:p>
+            <a:pPr algn="l"/>
+            <a:r>
+              <a:rPr sz="1500" b="0">
+                <a:solidFill>
+                  <a:srgbClr val="8A9098"/>
+                </a:solidFill>
+                <a:latin typeface="Calibri"/>
+              </a:rPr>
+              <a:t>Todo se explica por lo que cada red ya sabe antes de empezar</a:t>
+            </a:r>
+          </a:p>
+        </p:txBody>
+      </p:sp>
+      <p:sp>
+        <p:nvSpPr>
+          <p:cNvPr id="4" name="Rectangle 3"/>
+          <p:cNvSpPr/>
+          <p:nvPr/>
+        </p:nvSpPr>
+        <p:spPr>
+          <a:xfrm>
+            <a:off x="640080" y="1024128"/>
+            <a:ext cx="1371600" cy="32004"/>
+          </a:xfrm>
+          <a:prstGeom prst="rect">
+            <a:avLst/>
+          </a:prstGeom>
+          <a:solidFill>
+            <a:srgbClr val="8FB339"/>
+          </a:solidFill>
+          <a:ln>
+            <a:noFill/>
+          </a:ln>
+          <a:effectLst/>
+        </p:spPr>
+        <p:style>
+          <a:lnRef idx="1">
+            <a:schemeClr val="accent1"/>
+          </a:lnRef>
+          <a:fillRef idx="3">
+            <a:schemeClr val="accent1"/>
+          </a:fillRef>
+          <a:effectRef idx="2">
+            <a:schemeClr val="accent1"/>
+          </a:effectRef>
+          <a:fontRef idx="minor">
+            <a:schemeClr val="lt1"/>
+          </a:fontRef>
+        </p:style>
+        <p:txBody>
+          <a:bodyPr rtlCol="0" anchor="ctr"/>
+          <a:lstStyle/>
+          <a:p>
+            <a:pPr algn="ctr"/>
+          </a:p>
+        </p:txBody>
+      </p:sp>
+      <p:sp>
+        <p:nvSpPr>
+          <p:cNvPr id="5" name="Rectangle 4"/>
+          <p:cNvSpPr/>
+          <p:nvPr/>
+        </p:nvSpPr>
+        <p:spPr>
+          <a:xfrm>
+            <a:off x="640080" y="1627632"/>
+            <a:ext cx="5349240" cy="2240280"/>
+          </a:xfrm>
+          <a:prstGeom prst="rect">
+            <a:avLst/>
+          </a:prstGeom>
+          <a:solidFill>
+            <a:srgbClr val="F6F7F4"/>
+          </a:solidFill>
+          <a:ln w="22225">
+            <a:solidFill>
+              <a:srgbClr val="1F6FB2"/>
+            </a:solidFill>
+          </a:ln>
+          <a:effectLst/>
+        </p:spPr>
+        <p:style>
+          <a:lnRef idx="1">
+            <a:schemeClr val="accent1"/>
+          </a:lnRef>
+          <a:fillRef idx="3">
+            <a:schemeClr val="accent1"/>
+          </a:fillRef>
+          <a:effectRef idx="2">
+            <a:schemeClr val="accent1"/>
+          </a:effectRef>
+          <a:fontRef idx="minor">
+            <a:schemeClr val="lt1"/>
+          </a:fontRef>
+        </p:style>
+        <p:txBody>
+          <a:bodyPr rtlCol="0" anchor="ctr"/>
+          <a:lstStyle/>
+          <a:p/>
+        </p:txBody>
+      </p:sp>
+      <p:sp>
+        <p:nvSpPr>
+          <p:cNvPr id="6" name="TextBox 5"/>
+          <p:cNvSpPr txBox="1"/>
+          <p:nvPr/>
+        </p:nvSpPr>
+        <p:spPr>
+          <a:xfrm>
+            <a:off x="877824" y="1773936"/>
+            <a:ext cx="4892040" cy="365760"/>
+          </a:xfrm>
+          <a:prstGeom prst="rect">
+            <a:avLst/>
+          </a:prstGeom>
+          <a:noFill/>
+        </p:spPr>
+        <p:txBody>
+          <a:bodyPr wrap="square" anchor="t">
+            <a:spAutoFit/>
+          </a:bodyPr>
+          <a:lstStyle/>
+          <a:p>
+            <a:pPr algn="l"/>
+            <a:r>
+              <a:rPr sz="1600" b="1">
+                <a:solidFill>
+                  <a:srgbClr val="1F6FB2"/>
+                </a:solidFill>
+                <a:latin typeface="Calibri"/>
+              </a:rPr>
+              <a:t>ResNet-50 trae dos reglas de fábrica</a:t>
+            </a:r>
+          </a:p>
+        </p:txBody>
+      </p:sp>
+      <p:sp>
+        <p:nvSpPr>
+          <p:cNvPr id="7" name="TextBox 6"/>
+          <p:cNvSpPr txBox="1"/>
+          <p:nvPr/>
+        </p:nvSpPr>
+        <p:spPr>
+          <a:xfrm>
+            <a:off x="877824" y="2231136"/>
+            <a:ext cx="4892040" cy="1325880"/>
+          </a:xfrm>
+          <a:prstGeom prst="rect">
+            <a:avLst/>
+          </a:prstGeom>
+          <a:noFill/>
+        </p:spPr>
+        <p:txBody>
+          <a:bodyPr wrap="square">
+            <a:spAutoFit/>
+          </a:bodyPr>
+          <a:lstStyle/>
+          <a:p>
+            <a:pPr>
+              <a:spcAft>
+                <a:spcPts val="600"/>
+              </a:spcAft>
+            </a:pPr>
+            <a:r>
+              <a:rPr sz="1400" b="1">
+                <a:solidFill>
+                  <a:srgbClr val="1F6FB2"/>
+                </a:solidFill>
+              </a:rPr>
+              <a:t>▪  </a:t>
+            </a:r>
+            <a:r>
+              <a:rPr sz="1400">
+                <a:solidFill>
+                  <a:srgbClr val="444A52"/>
+                </a:solidFill>
+              </a:rPr>
+              <a:t>Lo que importa está cerca</a:t>
+            </a:r>
+          </a:p>
+          <a:p>
+            <a:pPr>
+              <a:spcAft>
+                <a:spcPts val="600"/>
+              </a:spcAft>
+            </a:pPr>
+            <a:r>
+              <a:rPr sz="1400" b="1">
+                <a:solidFill>
+                  <a:srgbClr val="1F6FB2"/>
+                </a:solidFill>
+              </a:rPr>
+              <a:t>▪  </a:t>
+            </a:r>
+            <a:r>
+              <a:rPr sz="1400">
+                <a:solidFill>
+                  <a:srgbClr val="444A52"/>
+                </a:solidFill>
+              </a:rPr>
+              <a:t>No importa en qué parte de la foto esté</a:t>
+            </a:r>
+          </a:p>
+        </p:txBody>
+      </p:sp>
+      <p:sp>
+        <p:nvSpPr>
+          <p:cNvPr id="8" name="TextBox 7"/>
+          <p:cNvSpPr txBox="1"/>
+          <p:nvPr/>
+        </p:nvSpPr>
+        <p:spPr>
+          <a:xfrm>
+            <a:off x="877824" y="3026664"/>
+            <a:ext cx="4892040" cy="731520"/>
+          </a:xfrm>
+          <a:prstGeom prst="rect">
+            <a:avLst/>
+          </a:prstGeom>
+          <a:noFill/>
+        </p:spPr>
+        <p:txBody>
+          <a:bodyPr wrap="square" anchor="t">
+            <a:spAutoFit/>
+          </a:bodyPr>
+          <a:lstStyle/>
+          <a:p>
+            <a:pPr algn="l"/>
+            <a:r>
+              <a:rPr sz="1100" b="0" i="1">
+                <a:solidFill>
+                  <a:srgbClr val="8A9098"/>
+                </a:solidFill>
+                <a:latin typeface="Calibri"/>
+              </a:rPr>
+              <a:t>Una mancha café es una mancha café, arriba o abajo de la fruta. Eso no lo aprende: ya lo trae.</a:t>
+            </a:r>
+          </a:p>
+        </p:txBody>
+      </p:sp>
+      <p:sp>
+        <p:nvSpPr>
+          <p:cNvPr id="9" name="Rectangle 8"/>
+          <p:cNvSpPr/>
+          <p:nvPr/>
+        </p:nvSpPr>
+        <p:spPr>
+          <a:xfrm>
+            <a:off x="6172200" y="1627632"/>
+            <a:ext cx="5349240" cy="2240280"/>
+          </a:xfrm>
+          <a:prstGeom prst="rect">
+            <a:avLst/>
+          </a:prstGeom>
+          <a:solidFill>
+            <a:srgbClr val="F6F7F4"/>
+          </a:solidFill>
+          <a:ln w="22225">
+            <a:solidFill>
+              <a:srgbClr val="D1495B"/>
+            </a:solidFill>
+          </a:ln>
+          <a:effectLst/>
+        </p:spPr>
+        <p:style>
+          <a:lnRef idx="1">
+            <a:schemeClr val="accent1"/>
+          </a:lnRef>
+          <a:fillRef idx="3">
+            <a:schemeClr val="accent1"/>
+          </a:fillRef>
+          <a:effectRef idx="2">
+            <a:schemeClr val="accent1"/>
+          </a:effectRef>
+          <a:fontRef idx="minor">
+            <a:schemeClr val="lt1"/>
+          </a:fontRef>
+        </p:style>
+        <p:txBody>
+          <a:bodyPr rtlCol="0" anchor="ctr"/>
+          <a:lstStyle/>
+          <a:p/>
+        </p:txBody>
+      </p:sp>
+      <p:sp>
+        <p:nvSpPr>
+          <p:cNvPr id="10" name="TextBox 9"/>
+          <p:cNvSpPr txBox="1"/>
+          <p:nvPr/>
+        </p:nvSpPr>
+        <p:spPr>
+          <a:xfrm>
+            <a:off x="6409944" y="1773936"/>
+            <a:ext cx="4892040" cy="365760"/>
+          </a:xfrm>
+          <a:prstGeom prst="rect">
+            <a:avLst/>
+          </a:prstGeom>
+          <a:noFill/>
+        </p:spPr>
+        <p:txBody>
+          <a:bodyPr wrap="square" anchor="t">
+            <a:spAutoFit/>
+          </a:bodyPr>
+          <a:lstStyle/>
+          <a:p>
+            <a:pPr algn="l"/>
+            <a:r>
+              <a:rPr sz="1600" b="1">
+                <a:solidFill>
+                  <a:srgbClr val="D1495B"/>
+                </a:solidFill>
+                <a:latin typeface="Calibri"/>
+              </a:rPr>
+              <a:t>ViT-S/16 no trae ninguna</a:t>
+            </a:r>
+          </a:p>
+        </p:txBody>
+      </p:sp>
+      <p:sp>
+        <p:nvSpPr>
+          <p:cNvPr id="11" name="TextBox 10"/>
+          <p:cNvSpPr txBox="1"/>
+          <p:nvPr/>
+        </p:nvSpPr>
+        <p:spPr>
+          <a:xfrm>
+            <a:off x="6409944" y="2231136"/>
+            <a:ext cx="4892040" cy="1325880"/>
+          </a:xfrm>
+          <a:prstGeom prst="rect">
+            <a:avLst/>
+          </a:prstGeom>
+          <a:noFill/>
+        </p:spPr>
+        <p:txBody>
+          <a:bodyPr wrap="square">
+            <a:spAutoFit/>
+          </a:bodyPr>
+          <a:lstStyle/>
+          <a:p>
+            <a:pPr>
+              <a:spcAft>
+                <a:spcPts val="600"/>
+              </a:spcAft>
+            </a:pPr>
+            <a:r>
+              <a:rPr sz="1400" b="1">
+                <a:solidFill>
+                  <a:srgbClr val="D1495B"/>
+                </a:solidFill>
+              </a:rPr>
+              <a:t>▪  </a:t>
+            </a:r>
+            <a:r>
+              <a:rPr sz="1400">
+                <a:solidFill>
+                  <a:srgbClr val="444A52"/>
+                </a:solidFill>
+              </a:rPr>
+              <a:t>Todos los cuadraditos le parecen iguales</a:t>
+            </a:r>
+          </a:p>
+          <a:p>
+            <a:pPr>
+              <a:spcAft>
+                <a:spcPts val="600"/>
+              </a:spcAft>
+            </a:pPr>
+            <a:r>
+              <a:rPr sz="1400" b="1">
+                <a:solidFill>
+                  <a:srgbClr val="D1495B"/>
+                </a:solidFill>
+              </a:rPr>
+              <a:t>▪  </a:t>
+            </a:r>
+            <a:r>
+              <a:rPr sz="1400">
+                <a:solidFill>
+                  <a:srgbClr val="444A52"/>
+                </a:solidFill>
+              </a:rPr>
+              <a:t>Ni siquiera sabe cuáles son vecinos</a:t>
+            </a:r>
+          </a:p>
+        </p:txBody>
+      </p:sp>
+      <p:sp>
+        <p:nvSpPr>
+          <p:cNvPr id="12" name="TextBox 11"/>
+          <p:cNvSpPr txBox="1"/>
+          <p:nvPr/>
+        </p:nvSpPr>
+        <p:spPr>
+          <a:xfrm>
+            <a:off x="6409944" y="3026664"/>
+            <a:ext cx="4892040" cy="731520"/>
+          </a:xfrm>
+          <a:prstGeom prst="rect">
+            <a:avLst/>
+          </a:prstGeom>
+          <a:noFill/>
+        </p:spPr>
+        <p:txBody>
+          <a:bodyPr wrap="square" anchor="t">
+            <a:spAutoFit/>
+          </a:bodyPr>
+          <a:lstStyle/>
+          <a:p>
+            <a:pPr algn="l"/>
+            <a:r>
+              <a:rPr sz="1100" b="0" i="1">
+                <a:solidFill>
+                  <a:srgbClr val="8A9098"/>
+                </a:solidFill>
+                <a:latin typeface="Calibri"/>
+              </a:rPr>
+              <a:t>Tiene que deducir de los ejemplos hasta la noción de «al lado».</a:t>
+            </a:r>
+          </a:p>
+        </p:txBody>
+      </p:sp>
+      <p:sp>
+        <p:nvSpPr>
+          <p:cNvPr id="13" name="TextBox 12"/>
+          <p:cNvSpPr txBox="1"/>
+          <p:nvPr/>
+        </p:nvSpPr>
+        <p:spPr>
+          <a:xfrm>
+            <a:off x="640080" y="4142232"/>
+            <a:ext cx="10881360" cy="4206240"/>
+          </a:xfrm>
+          <a:prstGeom prst="rect">
+            <a:avLst/>
+          </a:prstGeom>
+          <a:noFill/>
+        </p:spPr>
+        <p:txBody>
+          <a:bodyPr wrap="square">
+            <a:spAutoFit/>
+          </a:bodyPr>
+          <a:lstStyle/>
+          <a:p>
+            <a:pPr>
+              <a:spcAft>
+                <a:spcPts val="432"/>
+              </a:spcAft>
+            </a:pPr>
+            <a:r>
+              <a:rPr sz="1250" b="1">
+                <a:solidFill>
+                  <a:srgbClr val="8FB339"/>
+                </a:solidFill>
+              </a:rPr>
+              <a:t>▪  </a:t>
+            </a:r>
+            <a:r>
+              <a:rPr sz="1250" b="1">
+                <a:solidFill>
+                  <a:srgbClr val="444A52"/>
+                </a:solidFill>
+              </a:rPr>
+              <a:t>El ViT necesita muchísimos más ejemplos.</a:t>
+            </a:r>
+          </a:p>
+          <a:p>
+            <a:pPr>
+              <a:spcAft>
+                <a:spcPts val="432"/>
+              </a:spcAft>
+            </a:pPr>
+            <a:r>
+              <a:rPr sz="1250" b="1">
+                <a:solidFill>
+                  <a:srgbClr val="8FB339"/>
+                </a:solidFill>
+              </a:rPr>
+              <a:t>▪  </a:t>
+            </a:r>
+            <a:r>
+              <a:rPr sz="1250" b="0">
+                <a:solidFill>
+                  <a:srgbClr val="444A52"/>
+                </a:solidFill>
+              </a:rPr>
+              <a:t>La ResNet arranca sabiendo mirar imágenes; el ViT tiene que descubrir primero cómo se mira una imagen, y recién después aprender de paltas.</a:t>
+            </a:r>
+          </a:p>
+          <a:p>
+            <a:pPr>
+              <a:spcAft>
+                <a:spcPts val="432"/>
+              </a:spcAft>
+            </a:pPr>
+            <a:r>
+              <a:rPr sz="1250" b="1">
+                <a:solidFill>
+                  <a:srgbClr val="8FB339"/>
+                </a:solidFill>
+              </a:rPr>
+              <a:t>▪  </a:t>
+            </a:r>
+            <a:r>
+              <a:rPr sz="1250" b="1">
+                <a:solidFill>
+                  <a:srgbClr val="444A52"/>
+                </a:solidFill>
+              </a:rPr>
+              <a:t>Por eso los dos parten desde ImageNet.</a:t>
+            </a:r>
+          </a:p>
+          <a:p>
+            <a:pPr>
+              <a:spcAft>
+                <a:spcPts val="432"/>
+              </a:spcAft>
+            </a:pPr>
+            <a:r>
+              <a:rPr sz="1250" b="1">
+                <a:solidFill>
+                  <a:srgbClr val="8FB339"/>
+                </a:solidFill>
+              </a:rPr>
+              <a:t>▪  </a:t>
+            </a:r>
+            <a:r>
+              <a:rPr sz="1250" b="0">
+                <a:solidFill>
+                  <a:srgbClr val="444A52"/>
+                </a:solidFill>
+              </a:rPr>
+              <a:t>Antes de ver una sola palta ya vieron 1,3 millones de fotos de cosas cotidianas. Ahí el ViT compensa: llega con el oficio aprendido.</a:t>
+            </a:r>
+          </a:p>
+          <a:p>
+            <a:pPr>
+              <a:spcAft>
+                <a:spcPts val="432"/>
+              </a:spcAft>
+            </a:pPr>
+            <a:r>
+              <a:rPr sz="1250" b="1">
+                <a:solidFill>
+                  <a:srgbClr val="8FB339"/>
+                </a:solidFill>
+              </a:rPr>
+              <a:t>▪  </a:t>
+            </a:r>
+            <a:r>
+              <a:rPr sz="1250" b="1">
+                <a:solidFill>
+                  <a:srgbClr val="444A52"/>
+                </a:solidFill>
+              </a:rPr>
+              <a:t>Y por eso el ViT es más delicado de entrenar.</a:t>
+            </a:r>
+          </a:p>
+          <a:p>
+            <a:pPr>
+              <a:spcAft>
+                <a:spcPts val="432"/>
+              </a:spcAft>
+            </a:pPr>
+            <a:r>
+              <a:rPr sz="1250" b="1">
+                <a:solidFill>
+                  <a:srgbClr val="8FB339"/>
+                </a:solidFill>
+              </a:rPr>
+              <a:t>▪  </a:t>
+            </a:r>
+            <a:r>
+              <a:rPr sz="1250" b="0">
+                <a:solidFill>
+                  <a:srgbClr val="444A52"/>
+                </a:solidFill>
+              </a:rPr>
+              <a:t>Entrenar es bajar un cerro a ciegas y el learning rate es el tamaño del paso. La ResNet aguanta pasos grandes; el ViT se cae.</a:t>
+            </a:r>
+          </a:p>
+        </p:txBody>
+      </p:sp>
+      <p:sp>
+        <p:nvSpPr>
+          <p:cNvPr id="14" name="TextBox 13"/>
+          <p:cNvSpPr txBox="1"/>
+          <p:nvPr/>
+        </p:nvSpPr>
+        <p:spPr>
+          <a:xfrm>
+            <a:off x="11140135" y="6355080"/>
+            <a:ext cx="640080" cy="320040"/>
+          </a:xfrm>
+          <a:prstGeom prst="rect">
+            <a:avLst/>
+          </a:prstGeom>
+          <a:noFill/>
+        </p:spPr>
+        <p:txBody>
+          <a:bodyPr wrap="square" anchor="t">
+            <a:spAutoFit/>
+          </a:bodyPr>
+          <a:lstStyle/>
+          <a:p>
+            <a:pPr algn="r"/>
+            <a:r>
+              <a:rPr sz="1100" b="0">
+                <a:solidFill>
+                  <a:srgbClr val="8A9098"/>
+                </a:solidFill>
+                <a:latin typeface="Calibri"/>
+              </a:rPr>
+              <a:t>5/15</a:t>
+            </a:r>
+          </a:p>
+        </p:txBody>
+      </p:sp>
+    </p:spTree>
+  </p:cSld>
+  <p:clrMapOvr>
+    <a:masterClrMapping/>
+  </p:clrMapOvr>
+</p:sld>
+</file>
+
+<file path=ppt/slides/slide6.xml><?xml version="1.0" encoding="utf-8"?>
 <p:sld xmlns:a="http://schemas.openxmlformats.org/drawingml/2006/main" xmlns:p="http://schemas.openxmlformats.org/presentationml/2006/main" xmlns:r="http://schemas.openxmlformats.org/officeDocument/2006/relationships">
   <p:cSld>
     <p:spTree>
@@ -8190,7 +10785,7 @@
                 </a:solidFill>
                 <a:latin typeface="Calibri"/>
               </a:rPr>
-              <a:t>4/13</a:t>
+              <a:t>6/15</a:t>
             </a:r>
           </a:p>
         </p:txBody>
@@ -8203,7 +10798,7 @@
 </p:sld>
 </file>
 
-<file path=ppt/slides/slide5.xml><?xml version="1.0" encoding="utf-8"?>
+<file path=ppt/slides/slide7.xml><?xml version="1.0" encoding="utf-8"?>
 <p:sld xmlns:a="http://schemas.openxmlformats.org/drawingml/2006/main" xmlns:p="http://schemas.openxmlformats.org/presentationml/2006/main" xmlns:r="http://schemas.openxmlformats.org/officeDocument/2006/relationships">
   <p:cSld>
     <p:spTree>
@@ -8357,7 +10952,7 @@
                 </a:solidFill>
                 <a:latin typeface="Calibri"/>
               </a:rPr>
-              <a:t>5/13</a:t>
+              <a:t>7/15</a:t>
             </a:r>
           </a:p>
         </p:txBody>
@@ -8370,7 +10965,7 @@
 </p:sld>
 </file>
 
-<file path=ppt/slides/slide6.xml><?xml version="1.0" encoding="utf-8"?>
+<file path=ppt/slides/slide8.xml><?xml version="1.0" encoding="utf-8"?>
 <p:sld xmlns:a="http://schemas.openxmlformats.org/drawingml/2006/main" xmlns:p="http://schemas.openxmlformats.org/presentationml/2006/main" xmlns:r="http://schemas.openxmlformats.org/officeDocument/2006/relationships">
   <p:cSld>
     <p:spTree>
@@ -10099,1204 +12694,7 @@
                 </a:solidFill>
                 <a:latin typeface="Calibri"/>
               </a:rPr>
-              <a:t>6/13</a:t>
-            </a:r>
-          </a:p>
-        </p:txBody>
-      </p:sp>
-    </p:spTree>
-  </p:cSld>
-  <p:clrMapOvr>
-    <a:masterClrMapping/>
-  </p:clrMapOvr>
-</p:sld>
-</file>
-
-<file path=ppt/slides/slide7.xml><?xml version="1.0" encoding="utf-8"?>
-<p:sld xmlns:a="http://schemas.openxmlformats.org/drawingml/2006/main" xmlns:p="http://schemas.openxmlformats.org/presentationml/2006/main" xmlns:r="http://schemas.openxmlformats.org/officeDocument/2006/relationships">
-  <p:cSld>
-    <p:spTree>
-      <p:nvGrpSpPr>
-        <p:cNvPr id="1" name=""/>
-        <p:cNvGrpSpPr/>
-        <p:nvPr/>
-      </p:nvGrpSpPr>
-      <p:grpSpPr/>
-      <p:sp>
-        <p:nvSpPr>
-          <p:cNvPr id="2" name="TextBox 1"/>
-          <p:cNvSpPr txBox="1"/>
-          <p:nvPr/>
-        </p:nvSpPr>
-        <p:spPr>
-          <a:xfrm>
-            <a:off x="640080" y="384048"/>
-            <a:ext cx="10972800" cy="685800"/>
-          </a:xfrm>
-          <a:prstGeom prst="rect">
-            <a:avLst/>
-          </a:prstGeom>
-          <a:noFill/>
-        </p:spPr>
-        <p:txBody>
-          <a:bodyPr wrap="square" anchor="t">
-            <a:spAutoFit/>
-          </a:bodyPr>
-          <a:lstStyle/>
-          <a:p>
-            <a:pPr algn="l"/>
-            <a:r>
-              <a:rPr sz="3000" b="1">
-                <a:solidFill>
-                  <a:srgbClr val="2E6B2F"/>
-                </a:solidFill>
-                <a:latin typeface="Calibri"/>
-              </a:rPr>
-              <a:t>ResNet vs ViT: la comparación, no solo el número final</a:t>
-            </a:r>
-          </a:p>
-        </p:txBody>
-      </p:sp>
-      <p:sp>
-        <p:nvSpPr>
-          <p:cNvPr id="3" name="TextBox 2"/>
-          <p:cNvSpPr txBox="1"/>
-          <p:nvPr/>
-        </p:nvSpPr>
-        <p:spPr>
-          <a:xfrm>
-            <a:off x="640080" y="1078992"/>
-            <a:ext cx="10972800" cy="457200"/>
-          </a:xfrm>
-          <a:prstGeom prst="rect">
-            <a:avLst/>
-          </a:prstGeom>
-          <a:noFill/>
-        </p:spPr>
-        <p:txBody>
-          <a:bodyPr wrap="square" anchor="t">
-            <a:spAutoFit/>
-          </a:bodyPr>
-          <a:lstStyle/>
-          <a:p>
-            <a:pPr algn="l"/>
-            <a:r>
-              <a:rPr sz="1500" b="0">
-                <a:solidFill>
-                  <a:srgbClr val="8A9098"/>
-                </a:solidFill>
-                <a:latin typeface="Calibri"/>
-              </a:rPr>
-              <a:t>Todas las diferencias contra ResNet-50, bootstrap pareado agrupado por fruta</a:t>
-            </a:r>
-          </a:p>
-        </p:txBody>
-      </p:sp>
-      <p:sp>
-        <p:nvSpPr>
-          <p:cNvPr id="4" name="Rectangle 3"/>
-          <p:cNvSpPr/>
-          <p:nvPr/>
-        </p:nvSpPr>
-        <p:spPr>
-          <a:xfrm>
-            <a:off x="640080" y="1024128"/>
-            <a:ext cx="1371600" cy="32004"/>
-          </a:xfrm>
-          <a:prstGeom prst="rect">
-            <a:avLst/>
-          </a:prstGeom>
-          <a:solidFill>
-            <a:srgbClr val="8FB339"/>
-          </a:solidFill>
-          <a:ln>
-            <a:noFill/>
-          </a:ln>
-          <a:effectLst/>
-        </p:spPr>
-        <p:style>
-          <a:lnRef idx="1">
-            <a:schemeClr val="accent1"/>
-          </a:lnRef>
-          <a:fillRef idx="3">
-            <a:schemeClr val="accent1"/>
-          </a:fillRef>
-          <a:effectRef idx="2">
-            <a:schemeClr val="accent1"/>
-          </a:effectRef>
-          <a:fontRef idx="minor">
-            <a:schemeClr val="lt1"/>
-          </a:fontRef>
-        </p:style>
-        <p:txBody>
-          <a:bodyPr rtlCol="0" anchor="ctr"/>
-          <a:lstStyle/>
-          <a:p>
-            <a:pPr algn="ctr"/>
-          </a:p>
-        </p:txBody>
-      </p:sp>
-      <p:pic>
-        <p:nvPicPr>
-          <p:cNvPr id="5" name="Picture 4" descr="10_matrices_confusion_final.png"/>
-          <p:cNvPicPr>
-            <a:picLocks noChangeAspect="1"/>
-          </p:cNvPicPr>
-          <p:nvPr/>
-        </p:nvPicPr>
-        <p:blipFill>
-          <a:blip r:embed="rId2"/>
-          <a:stretch>
-            <a:fillRect/>
-          </a:stretch>
-        </p:blipFill>
-        <p:spPr>
-          <a:xfrm>
-            <a:off x="640080" y="1627632"/>
-            <a:ext cx="5760720" cy="4201745"/>
-          </a:xfrm>
-          <a:prstGeom prst="rect">
-            <a:avLst/>
-          </a:prstGeom>
-        </p:spPr>
-      </p:pic>
-      <p:sp>
-        <p:nvSpPr>
-          <p:cNvPr id="6" name="TextBox 5"/>
-          <p:cNvSpPr txBox="1"/>
-          <p:nvPr/>
-        </p:nvSpPr>
-        <p:spPr>
-          <a:xfrm>
-            <a:off x="6675120" y="1627632"/>
-            <a:ext cx="4937760" cy="4206240"/>
-          </a:xfrm>
-          <a:prstGeom prst="rect">
-            <a:avLst/>
-          </a:prstGeom>
-          <a:noFill/>
-        </p:spPr>
-        <p:txBody>
-          <a:bodyPr wrap="square">
-            <a:spAutoFit/>
-          </a:bodyPr>
-          <a:lstStyle/>
-          <a:p>
-            <a:pPr>
-              <a:spcAft>
-                <a:spcPts val="900"/>
-              </a:spcAft>
-            </a:pPr>
-            <a:r>
-              <a:rPr sz="1150" b="1">
-                <a:solidFill>
-                  <a:srgbClr val="8FB339"/>
-                </a:solidFill>
-              </a:rPr>
-              <a:t>▪  </a:t>
-            </a:r>
-            <a:r>
-              <a:rPr sz="1150" b="1">
-                <a:solidFill>
-                  <a:srgbClr val="444A52"/>
-                </a:solidFill>
-              </a:rPr>
-              <a:t>ViT-S/16:  Δ QWK = -0.0042  [-0.0095, +0.0006]  p = 0.095  → NO significativa</a:t>
-            </a:r>
-          </a:p>
-          <a:p>
-            <a:pPr>
-              <a:spcAft>
-                <a:spcPts val="900"/>
-              </a:spcAft>
-            </a:pPr>
-            <a:r>
-              <a:rPr sz="1150" b="1">
-                <a:solidFill>
-                  <a:srgbClr val="8FB339"/>
-                </a:solidFill>
-              </a:rPr>
-              <a:t>▪  </a:t>
-            </a:r>
-            <a:r>
-              <a:rPr sz="1150" b="1">
-                <a:solidFill>
-                  <a:srgbClr val="444A52"/>
-                </a:solidFill>
-              </a:rPr>
-              <a:t>ResNet-50 (scratch):  Δ QWK = -0.0203  [-0.0283, -0.0123]  p = 0.000  → significativa</a:t>
-            </a:r>
-          </a:p>
-          <a:p>
-            <a:pPr>
-              <a:spcAft>
-                <a:spcPts val="900"/>
-              </a:spcAft>
-            </a:pPr>
-            <a:r>
-              <a:rPr sz="1150" b="1">
-                <a:solidFill>
-                  <a:srgbClr val="8FB339"/>
-                </a:solidFill>
-              </a:rPr>
-              <a:t>▪  </a:t>
-            </a:r>
-            <a:r>
-              <a:rPr sz="1150" b="1">
-                <a:solidFill>
-                  <a:srgbClr val="444A52"/>
-                </a:solidFill>
-              </a:rPr>
-              <a:t>ViT-S/16 (scratch):  Δ QWK = -0.0465  [-0.0692, -0.0316]  p = 0.000  → significativa</a:t>
-            </a:r>
-          </a:p>
-          <a:p>
-            <a:pPr>
-              <a:spcAft>
-                <a:spcPts val="900"/>
-              </a:spcAft>
-            </a:pPr>
-            <a:r>
-              <a:rPr sz="1150" b="1">
-                <a:solidFill>
-                  <a:srgbClr val="8FB339"/>
-                </a:solidFill>
-              </a:rPr>
-              <a:t>▪  </a:t>
-            </a:r>
-            <a:r>
-              <a:rPr sz="1150" b="1">
-                <a:solidFill>
-                  <a:srgbClr val="444A52"/>
-                </a:solidFill>
-              </a:rPr>
-              <a:t>Híbrido · fusión tardía:  Δ QWK = +0.0055  [+0.0021, +0.0087]  p = 0.001  → significativa</a:t>
-            </a:r>
-          </a:p>
-          <a:p>
-            <a:pPr>
-              <a:spcAft>
-                <a:spcPts val="900"/>
-              </a:spcAft>
-            </a:pPr>
-            <a:r>
-              <a:rPr sz="1150" b="1">
-                <a:solidFill>
-                  <a:srgbClr val="8FB339"/>
-                </a:solidFill>
-              </a:rPr>
-              <a:t>▪  </a:t>
-            </a:r>
-            <a:r>
-              <a:rPr sz="1150" b="1">
-                <a:solidFill>
-                  <a:srgbClr val="444A52"/>
-                </a:solidFill>
-              </a:rPr>
-              <a:t>ViT-Hybrid R26+S/32:  Δ QWK = +0.0055  [+0.0005, +0.0104]  p = 0.031  → significativa</a:t>
-            </a:r>
-          </a:p>
-          <a:p>
-            <a:pPr>
-              <a:spcAft>
-                <a:spcPts val="900"/>
-              </a:spcAft>
-            </a:pPr>
-            <a:r>
-              <a:rPr sz="1150" b="1">
-                <a:solidFill>
-                  <a:srgbClr val="8FB339"/>
-                </a:solidFill>
-              </a:rPr>
-              <a:t>▪  </a:t>
-            </a:r>
-            <a:r>
-              <a:rPr sz="1150" b="0">
-                <a:solidFill>
-                  <a:srgbClr val="444A52"/>
-                </a:solidFill>
-              </a:rPr>
-              <a:t>Todas las matrices son bandeadas: los errores de distancia ≥ 2 son casi inexistentes. Ningún modelo confunde una palta verde con una sobremadura.</a:t>
-            </a:r>
-          </a:p>
-          <a:p>
-            <a:pPr>
-              <a:spcAft>
-                <a:spcPts val="900"/>
-              </a:spcAft>
-            </a:pPr>
-            <a:r>
-              <a:rPr sz="1150" b="1">
-                <a:solidFill>
-                  <a:srgbClr val="8FB339"/>
-                </a:solidFill>
-              </a:rPr>
-              <a:t>▪  </a:t>
-            </a:r>
-            <a:r>
-              <a:rPr sz="1150" b="0">
-                <a:solidFill>
-                  <a:srgbClr val="444A52"/>
-                </a:solidFill>
-              </a:rPr>
-              <a:t>El cuello de botella son las clases intermedias (2, 3 y 4), donde la frontera es un corte continuo y las etiquetas son más subjetivas.</a:t>
-            </a:r>
-          </a:p>
-          <a:p>
-            <a:pPr>
-              <a:spcAft>
-                <a:spcPts val="900"/>
-              </a:spcAft>
-            </a:pPr>
-            <a:r>
-              <a:rPr sz="1150" b="1">
-                <a:solidFill>
-                  <a:srgbClr val="8FB339"/>
-                </a:solidFill>
-              </a:rPr>
-              <a:t>▪  </a:t>
-            </a:r>
-            <a:r>
-              <a:rPr sz="1150" b="0">
-                <a:solidFill>
-                  <a:srgbClr val="444A52"/>
-                </a:solidFill>
-              </a:rPr>
-              <a:t>Los dos modelos desde cero pierden la estructura: el ViT colapsa hacia las clases altas y predice 4 para el 68 % de las paltas que son clase 5.</a:t>
-            </a:r>
-          </a:p>
-        </p:txBody>
-      </p:sp>
-      <p:sp>
-        <p:nvSpPr>
-          <p:cNvPr id="7" name="TextBox 6"/>
-          <p:cNvSpPr txBox="1"/>
-          <p:nvPr/>
-        </p:nvSpPr>
-        <p:spPr>
-          <a:xfrm>
-            <a:off x="11140135" y="6355080"/>
-            <a:ext cx="640080" cy="320040"/>
-          </a:xfrm>
-          <a:prstGeom prst="rect">
-            <a:avLst/>
-          </a:prstGeom>
-          <a:noFill/>
-        </p:spPr>
-        <p:txBody>
-          <a:bodyPr wrap="square" anchor="t">
-            <a:spAutoFit/>
-          </a:bodyPr>
-          <a:lstStyle/>
-          <a:p>
-            <a:pPr algn="r"/>
-            <a:r>
-              <a:rPr sz="1100" b="0">
-                <a:solidFill>
-                  <a:srgbClr val="8A9098"/>
-                </a:solidFill>
-                <a:latin typeface="Calibri"/>
-              </a:rPr>
-              <a:t>7/13</a:t>
-            </a:r>
-          </a:p>
-        </p:txBody>
-      </p:sp>
-    </p:spTree>
-  </p:cSld>
-  <p:clrMapOvr>
-    <a:masterClrMapping/>
-  </p:clrMapOvr>
-</p:sld>
-</file>
-
-<file path=ppt/slides/slide8.xml><?xml version="1.0" encoding="utf-8"?>
-<p:sld xmlns:a="http://schemas.openxmlformats.org/drawingml/2006/main" xmlns:p="http://schemas.openxmlformats.org/presentationml/2006/main" xmlns:r="http://schemas.openxmlformats.org/officeDocument/2006/relationships">
-  <p:cSld>
-    <p:spTree>
-      <p:nvGrpSpPr>
-        <p:cNvPr id="1" name=""/>
-        <p:cNvGrpSpPr/>
-        <p:nvPr/>
-      </p:nvGrpSpPr>
-      <p:grpSpPr/>
-      <p:sp>
-        <p:nvSpPr>
-          <p:cNvPr id="2" name="TextBox 1"/>
-          <p:cNvSpPr txBox="1"/>
-          <p:nvPr/>
-        </p:nvSpPr>
-        <p:spPr>
-          <a:xfrm>
-            <a:off x="640080" y="384048"/>
-            <a:ext cx="10972800" cy="685800"/>
-          </a:xfrm>
-          <a:prstGeom prst="rect">
-            <a:avLst/>
-          </a:prstGeom>
-          <a:noFill/>
-        </p:spPr>
-        <p:txBody>
-          <a:bodyPr wrap="square" anchor="t">
-            <a:spAutoFit/>
-          </a:bodyPr>
-          <a:lstStyle/>
-          <a:p>
-            <a:pPr algn="l"/>
-            <a:r>
-              <a:rPr sz="3000" b="1">
-                <a:solidFill>
-                  <a:srgbClr val="2E6B2F"/>
-                </a:solidFill>
-                <a:latin typeface="Calibri"/>
-              </a:rPr>
-              <a:t>Por qué difieren (o no) ResNet y ViT</a:t>
-            </a:r>
-          </a:p>
-        </p:txBody>
-      </p:sp>
-      <p:sp>
-        <p:nvSpPr>
-          <p:cNvPr id="3" name="TextBox 2"/>
-          <p:cNvSpPr txBox="1"/>
-          <p:nvPr/>
-        </p:nvSpPr>
-        <p:spPr>
-          <a:xfrm>
-            <a:off x="640080" y="1078992"/>
-            <a:ext cx="10972800" cy="457200"/>
-          </a:xfrm>
-          <a:prstGeom prst="rect">
-            <a:avLst/>
-          </a:prstGeom>
-          <a:noFill/>
-        </p:spPr>
-        <p:txBody>
-          <a:bodyPr wrap="square" anchor="t">
-            <a:spAutoFit/>
-          </a:bodyPr>
-          <a:lstStyle/>
-          <a:p>
-            <a:pPr algn="l"/>
-            <a:r>
-              <a:rPr sz="1500" b="0">
-                <a:solidFill>
-                  <a:srgbClr val="8A9098"/>
-                </a:solidFill>
-                <a:latin typeface="Calibri"/>
-              </a:rPr>
-              <a:t>La ablación sin pre-entrenamiento es la evidencia</a:t>
-            </a:r>
-          </a:p>
-        </p:txBody>
-      </p:sp>
-      <p:sp>
-        <p:nvSpPr>
-          <p:cNvPr id="4" name="Rectangle 3"/>
-          <p:cNvSpPr/>
-          <p:nvPr/>
-        </p:nvSpPr>
-        <p:spPr>
-          <a:xfrm>
-            <a:off x="640080" y="1024128"/>
-            <a:ext cx="1371600" cy="32004"/>
-          </a:xfrm>
-          <a:prstGeom prst="rect">
-            <a:avLst/>
-          </a:prstGeom>
-          <a:solidFill>
-            <a:srgbClr val="8FB339"/>
-          </a:solidFill>
-          <a:ln>
-            <a:noFill/>
-          </a:ln>
-          <a:effectLst/>
-        </p:spPr>
-        <p:style>
-          <a:lnRef idx="1">
-            <a:schemeClr val="accent1"/>
-          </a:lnRef>
-          <a:fillRef idx="3">
-            <a:schemeClr val="accent1"/>
-          </a:fillRef>
-          <a:effectRef idx="2">
-            <a:schemeClr val="accent1"/>
-          </a:effectRef>
-          <a:fontRef idx="minor">
-            <a:schemeClr val="lt1"/>
-          </a:fontRef>
-        </p:style>
-        <p:txBody>
-          <a:bodyPr rtlCol="0" anchor="ctr"/>
-          <a:lstStyle/>
-          <a:p>
-            <a:pPr algn="ctr"/>
-          </a:p>
-        </p:txBody>
-      </p:sp>
-      <p:graphicFrame>
-        <p:nvGraphicFramePr>
-          <p:cNvPr id="5" name="Table 4"/>
-          <p:cNvGraphicFramePr>
-            <a:graphicFrameLocks noGrp="1"/>
-          </p:cNvGraphicFramePr>
-          <p:nvPr/>
-        </p:nvGraphicFramePr>
-        <p:xfrm>
-          <a:off x="640080" y="1627632"/>
-          <a:ext cx="10881358" cy="1700784"/>
-        </p:xfrm>
-        <a:graphic>
-          <a:graphicData uri="http://schemas.openxmlformats.org/drawingml/2006/table">
-            <a:tbl>
-              <a:tblPr firstRow="1" bandRow="1">
-                <a:tableStyleId>{5C22544A-7EE6-4342-B048-85BDC9FD1C3A}</a:tableStyleId>
-              </a:tblPr>
-              <a:tblGrid>
-                <a:gridCol w="3557367"/>
-                <a:gridCol w="2092569"/>
-                <a:gridCol w="2092569"/>
-                <a:gridCol w="3138853"/>
-              </a:tblGrid>
-              <a:tr h="384048">
-                <a:tc>
-                  <a:txBody>
-                    <a:bodyPr/>
-                    <a:lstStyle/>
-                    <a:p>
-                      <a:pPr algn="l"/>
-                    </a:p>
-                  </a:txBody>
-                  <a:tcPr anchor="ctr" marL="82296" marR="82296">
-                    <a:solidFill>
-                      <a:srgbClr val="2E6B2F"/>
-                    </a:solidFill>
-                  </a:tcPr>
-                </a:tc>
-                <a:tc>
-                  <a:txBody>
-                    <a:bodyPr/>
-                    <a:lstStyle/>
-                    <a:p>
-                      <a:pPr algn="ctr"/>
-                      <a:r>
-                        <a:rPr sz="1300" b="1">
-                          <a:solidFill>
-                            <a:srgbClr val="FFFFFF"/>
-                          </a:solidFill>
-                          <a:latin typeface="Calibri"/>
-                        </a:rPr>
-                        <a:t>ResNet-50</a:t>
-                      </a:r>
-                    </a:p>
-                  </a:txBody>
-                  <a:tcPr anchor="ctr" marL="82296" marR="82296">
-                    <a:solidFill>
-                      <a:srgbClr val="2E6B2F"/>
-                    </a:solidFill>
-                  </a:tcPr>
-                </a:tc>
-                <a:tc>
-                  <a:txBody>
-                    <a:bodyPr/>
-                    <a:lstStyle/>
-                    <a:p>
-                      <a:pPr algn="ctr"/>
-                      <a:r>
-                        <a:rPr sz="1300" b="1">
-                          <a:solidFill>
-                            <a:srgbClr val="FFFFFF"/>
-                          </a:solidFill>
-                          <a:latin typeface="Calibri"/>
-                        </a:rPr>
-                        <a:t>ViT-S/16</a:t>
-                      </a:r>
-                    </a:p>
-                  </a:txBody>
-                  <a:tcPr anchor="ctr" marL="82296" marR="82296">
-                    <a:solidFill>
-                      <a:srgbClr val="2E6B2F"/>
-                    </a:solidFill>
-                  </a:tcPr>
-                </a:tc>
-                <a:tc>
-                  <a:txBody>
-                    <a:bodyPr/>
-                    <a:lstStyle/>
-                    <a:p>
-                      <a:pPr algn="ctr"/>
-                      <a:r>
-                        <a:rPr sz="1300" b="1">
-                          <a:solidFill>
-                            <a:srgbClr val="FFFFFF"/>
-                          </a:solidFill>
-                          <a:latin typeface="Calibri"/>
-                        </a:rPr>
-                        <a:t>Lectura</a:t>
-                      </a:r>
-                    </a:p>
-                  </a:txBody>
-                  <a:tcPr anchor="ctr" marL="82296" marR="82296">
-                    <a:solidFill>
-                      <a:srgbClr val="2E6B2F"/>
-                    </a:solidFill>
-                  </a:tcPr>
-                </a:tc>
-              </a:tr>
-              <a:tr h="329184">
-                <a:tc>
-                  <a:txBody>
-                    <a:bodyPr/>
-                    <a:lstStyle/>
-                    <a:p>
-                      <a:pPr algn="l"/>
-                      <a:r>
-                        <a:rPr sz="1300" b="0">
-                          <a:solidFill>
-                            <a:srgbClr val="444A52"/>
-                          </a:solidFill>
-                          <a:latin typeface="Calibri"/>
-                        </a:rPr>
-                        <a:t>QWK con ImageNet-1k</a:t>
-                      </a:r>
-                    </a:p>
-                  </a:txBody>
-                  <a:tcPr anchor="ctr" marL="82296" marR="82296">
-                    <a:solidFill>
-                      <a:srgbClr val="FFFFFF"/>
-                    </a:solidFill>
-                  </a:tcPr>
-                </a:tc>
-                <a:tc>
-                  <a:txBody>
-                    <a:bodyPr/>
-                    <a:lstStyle/>
-                    <a:p>
-                      <a:pPr algn="ctr"/>
-                      <a:r>
-                        <a:rPr sz="1300" b="0">
-                          <a:solidFill>
-                            <a:srgbClr val="444A52"/>
-                          </a:solidFill>
-                          <a:latin typeface="Calibri"/>
-                        </a:rPr>
-                        <a:t>0.936</a:t>
-                      </a:r>
-                    </a:p>
-                  </a:txBody>
-                  <a:tcPr anchor="ctr" marL="82296" marR="82296">
-                    <a:solidFill>
-                      <a:srgbClr val="FFFFFF"/>
-                    </a:solidFill>
-                  </a:tcPr>
-                </a:tc>
-                <a:tc>
-                  <a:txBody>
-                    <a:bodyPr/>
-                    <a:lstStyle/>
-                    <a:p>
-                      <a:pPr algn="ctr"/>
-                      <a:r>
-                        <a:rPr sz="1300" b="0">
-                          <a:solidFill>
-                            <a:srgbClr val="444A52"/>
-                          </a:solidFill>
-                          <a:latin typeface="Calibri"/>
-                        </a:rPr>
-                        <a:t>0.931</a:t>
-                      </a:r>
-                    </a:p>
-                  </a:txBody>
-                  <a:tcPr anchor="ctr" marL="82296" marR="82296">
-                    <a:solidFill>
-                      <a:srgbClr val="FFFFFF"/>
-                    </a:solidFill>
-                  </a:tcPr>
-                </a:tc>
-                <a:tc>
-                  <a:txBody>
-                    <a:bodyPr/>
-                    <a:lstStyle/>
-                    <a:p>
-                      <a:pPr algn="ctr"/>
-                    </a:p>
-                  </a:txBody>
-                  <a:tcPr anchor="ctr" marL="82296" marR="82296">
-                    <a:solidFill>
-                      <a:srgbClr val="FFFFFF"/>
-                    </a:solidFill>
-                  </a:tcPr>
-                </a:tc>
-              </a:tr>
-              <a:tr h="329184">
-                <a:tc>
-                  <a:txBody>
-                    <a:bodyPr/>
-                    <a:lstStyle/>
-                    <a:p>
-                      <a:pPr algn="l"/>
-                      <a:r>
-                        <a:rPr sz="1300" b="0">
-                          <a:solidFill>
-                            <a:srgbClr val="444A52"/>
-                          </a:solidFill>
-                          <a:latin typeface="Calibri"/>
-                        </a:rPr>
-                        <a:t>QWK desde cero</a:t>
-                      </a:r>
-                    </a:p>
-                  </a:txBody>
-                  <a:tcPr anchor="ctr" marL="82296" marR="82296">
-                    <a:solidFill>
-                      <a:srgbClr val="F6F7F4"/>
-                    </a:solidFill>
-                  </a:tcPr>
-                </a:tc>
-                <a:tc>
-                  <a:txBody>
-                    <a:bodyPr/>
-                    <a:lstStyle/>
-                    <a:p>
-                      <a:pPr algn="ctr"/>
-                      <a:r>
-                        <a:rPr sz="1300" b="0">
-                          <a:solidFill>
-                            <a:srgbClr val="444A52"/>
-                          </a:solidFill>
-                          <a:latin typeface="Calibri"/>
-                        </a:rPr>
-                        <a:t>0.915</a:t>
-                      </a:r>
-                    </a:p>
-                  </a:txBody>
-                  <a:tcPr anchor="ctr" marL="82296" marR="82296">
-                    <a:solidFill>
-                      <a:srgbClr val="F6F7F4"/>
-                    </a:solidFill>
-                  </a:tcPr>
-                </a:tc>
-                <a:tc>
-                  <a:txBody>
-                    <a:bodyPr/>
-                    <a:lstStyle/>
-                    <a:p>
-                      <a:pPr algn="ctr"/>
-                      <a:r>
-                        <a:rPr sz="1300" b="0">
-                          <a:solidFill>
-                            <a:srgbClr val="444A52"/>
-                          </a:solidFill>
-                          <a:latin typeface="Calibri"/>
-                        </a:rPr>
-                        <a:t>0.889</a:t>
-                      </a:r>
-                    </a:p>
-                  </a:txBody>
-                  <a:tcPr anchor="ctr" marL="82296" marR="82296">
-                    <a:solidFill>
-                      <a:srgbClr val="F6F7F4"/>
-                    </a:solidFill>
-                  </a:tcPr>
-                </a:tc>
-                <a:tc>
-                  <a:txBody>
-                    <a:bodyPr/>
-                    <a:lstStyle/>
-                    <a:p>
-                      <a:pPr algn="ctr"/>
-                    </a:p>
-                  </a:txBody>
-                  <a:tcPr anchor="ctr" marL="82296" marR="82296">
-                    <a:solidFill>
-                      <a:srgbClr val="F6F7F4"/>
-                    </a:solidFill>
-                  </a:tcPr>
-                </a:tc>
-              </a:tr>
-              <a:tr h="329184">
-                <a:tc>
-                  <a:txBody>
-                    <a:bodyPr/>
-                    <a:lstStyle/>
-                    <a:p>
-                      <a:pPr algn="l"/>
-                      <a:r>
-                        <a:rPr sz="1300" b="0">
-                          <a:solidFill>
-                            <a:srgbClr val="444A52"/>
-                          </a:solidFill>
-                          <a:latin typeface="Calibri"/>
-                        </a:rPr>
-                        <a:t>Δ sin pre-entrenamiento</a:t>
-                      </a:r>
-                    </a:p>
-                  </a:txBody>
-                  <a:tcPr anchor="ctr" marL="82296" marR="82296">
-                    <a:solidFill>
-                      <a:srgbClr val="FFFFFF"/>
-                    </a:solidFill>
-                  </a:tcPr>
-                </a:tc>
-                <a:tc>
-                  <a:txBody>
-                    <a:bodyPr/>
-                    <a:lstStyle/>
-                    <a:p>
-                      <a:pPr algn="ctr"/>
-                      <a:r>
-                        <a:rPr sz="1300" b="0">
-                          <a:solidFill>
-                            <a:srgbClr val="444A52"/>
-                          </a:solidFill>
-                          <a:latin typeface="Calibri"/>
-                        </a:rPr>
-                        <a:t>-0.0203</a:t>
-                      </a:r>
-                    </a:p>
-                  </a:txBody>
-                  <a:tcPr anchor="ctr" marL="82296" marR="82296">
-                    <a:solidFill>
-                      <a:srgbClr val="FFFFFF"/>
-                    </a:solidFill>
-                  </a:tcPr>
-                </a:tc>
-                <a:tc>
-                  <a:txBody>
-                    <a:bodyPr/>
-                    <a:lstStyle/>
-                    <a:p>
-                      <a:pPr algn="ctr"/>
-                      <a:r>
-                        <a:rPr sz="1300" b="0">
-                          <a:solidFill>
-                            <a:srgbClr val="444A52"/>
-                          </a:solidFill>
-                          <a:latin typeface="Calibri"/>
-                        </a:rPr>
-                        <a:t>-0.0422</a:t>
-                      </a:r>
-                    </a:p>
-                  </a:txBody>
-                  <a:tcPr anchor="ctr" marL="82296" marR="82296">
-                    <a:solidFill>
-                      <a:srgbClr val="FFFFFF"/>
-                    </a:solidFill>
-                  </a:tcPr>
-                </a:tc>
-                <a:tc>
-                  <a:txBody>
-                    <a:bodyPr/>
-                    <a:lstStyle/>
-                    <a:p>
-                      <a:pPr algn="ctr"/>
-                      <a:r>
-                        <a:rPr sz="1300" b="0">
-                          <a:solidFill>
-                            <a:srgbClr val="444A52"/>
-                          </a:solidFill>
-                          <a:latin typeface="Calibri"/>
-                        </a:rPr>
-                        <a:t>el ViT pierde 2.1× más</a:t>
-                      </a:r>
-                    </a:p>
-                  </a:txBody>
-                  <a:tcPr anchor="ctr" marL="82296" marR="82296">
-                    <a:solidFill>
-                      <a:srgbClr val="FFFFFF"/>
-                    </a:solidFill>
-                  </a:tcPr>
-                </a:tc>
-              </a:tr>
-              <a:tr h="329184">
-                <a:tc>
-                  <a:txBody>
-                    <a:bodyPr/>
-                    <a:lstStyle/>
-                    <a:p>
-                      <a:pPr algn="l"/>
-                      <a:r>
-                        <a:rPr sz="1300" b="0">
-                          <a:solidFill>
-                            <a:srgbClr val="444A52"/>
-                          </a:solidFill>
-                          <a:latin typeface="Calibri"/>
-                        </a:rPr>
-                        <a:t>Δ accuracy sin pre-entren.</a:t>
-                      </a:r>
-                    </a:p>
-                  </a:txBody>
-                  <a:tcPr anchor="ctr" marL="82296" marR="82296">
-                    <a:solidFill>
-                      <a:srgbClr val="F6F7F4"/>
-                    </a:solidFill>
-                  </a:tcPr>
-                </a:tc>
-                <a:tc>
-                  <a:txBody>
-                    <a:bodyPr/>
-                    <a:lstStyle/>
-                    <a:p>
-                      <a:pPr algn="ctr"/>
-                      <a:r>
-                        <a:rPr sz="1300" b="0">
-                          <a:solidFill>
-                            <a:srgbClr val="444A52"/>
-                          </a:solidFill>
-                          <a:latin typeface="Calibri"/>
-                        </a:rPr>
-                        <a:t>-7.4 pts</a:t>
-                      </a:r>
-                    </a:p>
-                  </a:txBody>
-                  <a:tcPr anchor="ctr" marL="82296" marR="82296">
-                    <a:solidFill>
-                      <a:srgbClr val="F6F7F4"/>
-                    </a:solidFill>
-                  </a:tcPr>
-                </a:tc>
-                <a:tc>
-                  <a:txBody>
-                    <a:bodyPr/>
-                    <a:lstStyle/>
-                    <a:p>
-                      <a:pPr algn="ctr"/>
-                      <a:r>
-                        <a:rPr sz="1300" b="0">
-                          <a:solidFill>
-                            <a:srgbClr val="444A52"/>
-                          </a:solidFill>
-                          <a:latin typeface="Calibri"/>
-                        </a:rPr>
-                        <a:t>-11.0 pts</a:t>
-                      </a:r>
-                    </a:p>
-                  </a:txBody>
-                  <a:tcPr anchor="ctr" marL="82296" marR="82296">
-                    <a:solidFill>
-                      <a:srgbClr val="F6F7F4"/>
-                    </a:solidFill>
-                  </a:tcPr>
-                </a:tc>
-                <a:tc>
-                  <a:txBody>
-                    <a:bodyPr/>
-                    <a:lstStyle/>
-                    <a:p>
-                      <a:pPr algn="ctr"/>
-                      <a:r>
-                        <a:rPr sz="1300" b="0">
-                          <a:solidFill>
-                            <a:srgbClr val="444A52"/>
-                          </a:solidFill>
-                          <a:latin typeface="Calibri"/>
-                        </a:rPr>
-                        <a:t>el ViT pierde 1.5× más</a:t>
-                      </a:r>
-                    </a:p>
-                  </a:txBody>
-                  <a:tcPr anchor="ctr" marL="82296" marR="82296">
-                    <a:solidFill>
-                      <a:srgbClr val="F6F7F4"/>
-                    </a:solidFill>
-                  </a:tcPr>
-                </a:tc>
-              </a:tr>
-            </a:tbl>
-          </a:graphicData>
-        </a:graphic>
-      </p:graphicFrame>
-      <p:sp>
-        <p:nvSpPr>
-          <p:cNvPr id="6" name="TextBox 5"/>
-          <p:cNvSpPr txBox="1"/>
-          <p:nvPr/>
-        </p:nvSpPr>
-        <p:spPr>
-          <a:xfrm>
-            <a:off x="640080" y="3913632"/>
-            <a:ext cx="10881360" cy="4206240"/>
-          </a:xfrm>
-          <a:prstGeom prst="rect">
-            <a:avLst/>
-          </a:prstGeom>
-          <a:noFill/>
-        </p:spPr>
-        <p:txBody>
-          <a:bodyPr wrap="square">
-            <a:spAutoFit/>
-          </a:bodyPr>
-          <a:lstStyle/>
-          <a:p>
-            <a:pPr>
-              <a:spcAft>
-                <a:spcPts val="1300"/>
-              </a:spcAft>
-            </a:pPr>
-            <a:r>
-              <a:rPr sz="1500" b="1">
-                <a:solidFill>
-                  <a:srgbClr val="8FB339"/>
-                </a:solidFill>
-              </a:rPr>
-              <a:t>▪  </a:t>
-            </a:r>
-            <a:r>
-              <a:rPr sz="1500" b="1">
-                <a:solidFill>
-                  <a:srgbClr val="444A52"/>
-                </a:solidFill>
-              </a:rPr>
-              <a:t>La ResNet trae el sesgo inductivo incorporado en la arquitectura.</a:t>
-            </a:r>
-          </a:p>
-          <a:p>
-            <a:pPr>
-              <a:spcAft>
-                <a:spcPts val="1300"/>
-              </a:spcAft>
-            </a:pPr>
-            <a:r>
-              <a:rPr sz="1500" b="1">
-                <a:solidFill>
-                  <a:srgbClr val="8FB339"/>
-                </a:solidFill>
-              </a:rPr>
-              <a:t>▪  </a:t>
-            </a:r>
-            <a:r>
-              <a:rPr sz="1500" b="0">
-                <a:solidFill>
-                  <a:srgbClr val="444A52"/>
-                </a:solidFill>
-              </a:rPr>
-              <a:t>La convolución asume localidad y equivarianza a la traslación: una mancha café significa lo mismo esté donde esté en la fruta. Eso no hay que aprenderlo.</a:t>
-            </a:r>
-          </a:p>
-          <a:p>
-            <a:pPr>
-              <a:spcAft>
-                <a:spcPts val="1300"/>
-              </a:spcAft>
-            </a:pPr>
-            <a:r>
-              <a:rPr sz="1500" b="1">
-                <a:solidFill>
-                  <a:srgbClr val="8FB339"/>
-                </a:solidFill>
-              </a:rPr>
-              <a:t>▪  </a:t>
-            </a:r>
-            <a:r>
-              <a:rPr sz="1500" b="1">
-                <a:solidFill>
-                  <a:srgbClr val="444A52"/>
-                </a:solidFill>
-              </a:rPr>
-              <a:t>El ViT tiene que aprender ese sesgo de los datos.</a:t>
-            </a:r>
-          </a:p>
-          <a:p>
-            <a:pPr>
-              <a:spcAft>
-                <a:spcPts val="1300"/>
-              </a:spcAft>
-            </a:pPr>
-            <a:r>
-              <a:rPr sz="1500" b="1">
-                <a:solidFill>
-                  <a:srgbClr val="8FB339"/>
-                </a:solidFill>
-              </a:rPr>
-              <a:t>▪  </a:t>
-            </a:r>
-            <a:r>
-              <a:rPr sz="1500" b="0">
-                <a:solidFill>
-                  <a:srgbClr val="444A52"/>
-                </a:solidFill>
-              </a:rPr>
-              <a:t>La auto-atención es global desde la primera capa y no asume nada sobre estructura espacial. Con 10.208 imágenes de 334 frutas no alcanza para descubrirlo desde cero; con ImageNet-1k detrás, sí.</a:t>
-            </a:r>
-          </a:p>
-          <a:p>
-            <a:pPr>
-              <a:spcAft>
-                <a:spcPts val="1300"/>
-              </a:spcAft>
-            </a:pPr>
-            <a:r>
-              <a:rPr sz="1500" b="1">
-                <a:solidFill>
-                  <a:srgbClr val="8FB339"/>
-                </a:solidFill>
-              </a:rPr>
-              <a:t>▪  </a:t>
-            </a:r>
-            <a:r>
-              <a:rPr sz="1500" b="1">
-                <a:solidFill>
-                  <a:srgbClr val="444A52"/>
-                </a:solidFill>
-              </a:rPr>
-              <a:t>Es un problema de textura local, no de forma global.</a:t>
-            </a:r>
-          </a:p>
-          <a:p>
-            <a:pPr>
-              <a:spcAft>
-                <a:spcPts val="1300"/>
-              </a:spcAft>
-            </a:pPr>
-            <a:r>
-              <a:rPr sz="1500" b="1">
-                <a:solidFill>
-                  <a:srgbClr val="8FB339"/>
-                </a:solidFill>
-              </a:rPr>
-              <a:t>▪  </a:t>
-            </a:r>
-            <a:r>
-              <a:rPr sz="1500" b="0">
-                <a:solidFill>
-                  <a:srgbClr val="444A52"/>
-                </a:solidFill>
-              </a:rPr>
-              <a:t>El índice de madurez se lee en el color y las manchas de la cáscara, justo donde la convolución es fuerte. El campo receptivo global del ViT aporta poco.</a:t>
-            </a:r>
-          </a:p>
-        </p:txBody>
-      </p:sp>
-      <p:sp>
-        <p:nvSpPr>
-          <p:cNvPr id="7" name="TextBox 6"/>
-          <p:cNvSpPr txBox="1"/>
-          <p:nvPr/>
-        </p:nvSpPr>
-        <p:spPr>
-          <a:xfrm>
-            <a:off x="11140135" y="6355080"/>
-            <a:ext cx="640080" cy="320040"/>
-          </a:xfrm>
-          <a:prstGeom prst="rect">
-            <a:avLst/>
-          </a:prstGeom>
-          <a:noFill/>
-        </p:spPr>
-        <p:txBody>
-          <a:bodyPr wrap="square" anchor="t">
-            <a:spAutoFit/>
-          </a:bodyPr>
-          <a:lstStyle/>
-          <a:p>
-            <a:pPr algn="r"/>
-            <a:r>
-              <a:rPr sz="1100" b="0">
-                <a:solidFill>
-                  <a:srgbClr val="8A9098"/>
-                </a:solidFill>
-                <a:latin typeface="Calibri"/>
-              </a:rPr>
-              <a:t>8/13</a:t>
+              <a:t>8/15</a:t>
             </a:r>
           </a:p>
         </p:txBody>
@@ -11349,7 +12747,7 @@
                 </a:solidFill>
                 <a:latin typeface="Calibri"/>
               </a:rPr>
-              <a:t>Los híbridos</a:t>
+              <a:t>ResNet vs ViT: la comparación, no solo el número final</a:t>
             </a:r>
           </a:p>
         </p:txBody>
@@ -11384,7 +12782,7 @@
                 </a:solidFill>
                 <a:latin typeface="Calibri"/>
               </a:rPr>
-              <a:t>¿Suma combinar ambos enfoques?</a:t>
+              <a:t>Todas las diferencias contra ResNet-50, bootstrap pareado agrupado por fruta</a:t>
             </a:r>
           </a:p>
         </p:txBody>
@@ -11433,510 +12831,9 @@
           </a:p>
         </p:txBody>
       </p:sp>
-      <p:sp>
-        <p:nvSpPr>
-          <p:cNvPr id="5" name="Rectangle 4"/>
-          <p:cNvSpPr/>
-          <p:nvPr/>
-        </p:nvSpPr>
-        <p:spPr>
-          <a:xfrm>
-            <a:off x="640080" y="1627632"/>
-            <a:ext cx="5303520" cy="1463040"/>
-          </a:xfrm>
-          <a:prstGeom prst="rect">
-            <a:avLst/>
-          </a:prstGeom>
-          <a:solidFill>
-            <a:srgbClr val="F6F7F4"/>
-          </a:solidFill>
-          <a:ln w="12700">
-            <a:solidFill>
-              <a:srgbClr val="DDE2D8"/>
-            </a:solidFill>
-          </a:ln>
-          <a:effectLst/>
-        </p:spPr>
-        <p:style>
-          <a:lnRef idx="1">
-            <a:schemeClr val="accent1"/>
-          </a:lnRef>
-          <a:fillRef idx="3">
-            <a:schemeClr val="accent1"/>
-          </a:fillRef>
-          <a:effectRef idx="2">
-            <a:schemeClr val="accent1"/>
-          </a:effectRef>
-          <a:fontRef idx="minor">
-            <a:schemeClr val="lt1"/>
-          </a:fontRef>
-        </p:style>
-        <p:txBody>
-          <a:bodyPr rtlCol="0" anchor="ctr"/>
-          <a:lstStyle/>
-          <a:p/>
-        </p:txBody>
-      </p:sp>
-      <p:sp>
-        <p:nvSpPr>
-          <p:cNvPr id="6" name="Rectangle 5"/>
-          <p:cNvSpPr/>
-          <p:nvPr/>
-        </p:nvSpPr>
-        <p:spPr>
-          <a:xfrm>
-            <a:off x="640080" y="1627632"/>
-            <a:ext cx="50292" cy="1463040"/>
-          </a:xfrm>
-          <a:prstGeom prst="rect">
-            <a:avLst/>
-          </a:prstGeom>
-          <a:solidFill>
-            <a:srgbClr val="6A4C93"/>
-          </a:solidFill>
-          <a:ln>
-            <a:noFill/>
-          </a:ln>
-          <a:effectLst/>
-        </p:spPr>
-        <p:style>
-          <a:lnRef idx="1">
-            <a:schemeClr val="accent1"/>
-          </a:lnRef>
-          <a:fillRef idx="3">
-            <a:schemeClr val="accent1"/>
-          </a:fillRef>
-          <a:effectRef idx="2">
-            <a:schemeClr val="accent1"/>
-          </a:effectRef>
-          <a:fontRef idx="minor">
-            <a:schemeClr val="lt1"/>
-          </a:fontRef>
-        </p:style>
-        <p:txBody>
-          <a:bodyPr rtlCol="0" anchor="ctr"/>
-          <a:lstStyle/>
-          <a:p>
-            <a:pPr algn="ctr"/>
-          </a:p>
-        </p:txBody>
-      </p:sp>
-      <p:sp>
-        <p:nvSpPr>
-          <p:cNvPr id="7" name="TextBox 6"/>
-          <p:cNvSpPr txBox="1"/>
-          <p:nvPr/>
-        </p:nvSpPr>
-        <p:spPr>
-          <a:xfrm>
-            <a:off x="896112" y="1773936"/>
-            <a:ext cx="4892040" cy="320040"/>
-          </a:xfrm>
-          <a:prstGeom prst="rect">
-            <a:avLst/>
-          </a:prstGeom>
-          <a:noFill/>
-        </p:spPr>
-        <p:txBody>
-          <a:bodyPr wrap="square" anchor="t">
-            <a:spAutoFit/>
-          </a:bodyPr>
-          <a:lstStyle/>
-          <a:p>
-            <a:pPr algn="l"/>
-            <a:r>
-              <a:rPr sz="1200" b="1">
-                <a:solidFill>
-                  <a:srgbClr val="8A9098"/>
-                </a:solidFill>
-                <a:latin typeface="Calibri"/>
-              </a:rPr>
-              <a:t>HÍBRIDO · FUSIÓN TARDÍA</a:t>
-            </a:r>
-          </a:p>
-        </p:txBody>
-      </p:sp>
-      <p:sp>
-        <p:nvSpPr>
-          <p:cNvPr id="8" name="TextBox 7"/>
-          <p:cNvSpPr txBox="1"/>
-          <p:nvPr/>
-        </p:nvSpPr>
-        <p:spPr>
-          <a:xfrm>
-            <a:off x="896112" y="2103120"/>
-            <a:ext cx="4892040" cy="566928"/>
-          </a:xfrm>
-          <a:prstGeom prst="rect">
-            <a:avLst/>
-          </a:prstGeom>
-          <a:noFill/>
-        </p:spPr>
-        <p:txBody>
-          <a:bodyPr wrap="square" anchor="t">
-            <a:spAutoFit/>
-          </a:bodyPr>
-          <a:lstStyle/>
-          <a:p>
-            <a:pPr algn="l"/>
-            <a:r>
-              <a:rPr sz="3000" b="1">
-                <a:solidFill>
-                  <a:srgbClr val="6A4C93"/>
-                </a:solidFill>
-                <a:latin typeface="Calibri"/>
-              </a:rPr>
-              <a:t>QWK 0.941</a:t>
-            </a:r>
-          </a:p>
-        </p:txBody>
-      </p:sp>
-      <p:sp>
-        <p:nvSpPr>
-          <p:cNvPr id="9" name="TextBox 8"/>
-          <p:cNvSpPr txBox="1"/>
-          <p:nvPr/>
-        </p:nvSpPr>
-        <p:spPr>
-          <a:xfrm>
-            <a:off x="896112" y="2523744"/>
-            <a:ext cx="4892040" cy="457200"/>
-          </a:xfrm>
-          <a:prstGeom prst="rect">
-            <a:avLst/>
-          </a:prstGeom>
-          <a:noFill/>
-        </p:spPr>
-        <p:txBody>
-          <a:bodyPr wrap="square" anchor="t">
-            <a:spAutoFit/>
-          </a:bodyPr>
-          <a:lstStyle/>
-          <a:p>
-            <a:pPr algn="l"/>
-            <a:r>
-              <a:rPr sz="1100" b="0">
-                <a:solidFill>
-                  <a:srgbClr val="8A9098"/>
-                </a:solidFill>
-                <a:latin typeface="Calibri"/>
-              </a:rPr>
-              <a:t>46.4 M params · 16.7 GFLOPs · acc 76.7 %</a:t>
-            </a:r>
-          </a:p>
-        </p:txBody>
-      </p:sp>
-      <p:sp>
-        <p:nvSpPr>
-          <p:cNvPr id="10" name="Rectangle 9"/>
-          <p:cNvSpPr/>
-          <p:nvPr/>
-        </p:nvSpPr>
-        <p:spPr>
-          <a:xfrm>
-            <a:off x="6217920" y="1627632"/>
-            <a:ext cx="5303520" cy="1463040"/>
-          </a:xfrm>
-          <a:prstGeom prst="rect">
-            <a:avLst/>
-          </a:prstGeom>
-          <a:solidFill>
-            <a:srgbClr val="F6F7F4"/>
-          </a:solidFill>
-          <a:ln w="12700">
-            <a:solidFill>
-              <a:srgbClr val="DDE2D8"/>
-            </a:solidFill>
-          </a:ln>
-          <a:effectLst/>
-        </p:spPr>
-        <p:style>
-          <a:lnRef idx="1">
-            <a:schemeClr val="accent1"/>
-          </a:lnRef>
-          <a:fillRef idx="3">
-            <a:schemeClr val="accent1"/>
-          </a:fillRef>
-          <a:effectRef idx="2">
-            <a:schemeClr val="accent1"/>
-          </a:effectRef>
-          <a:fontRef idx="minor">
-            <a:schemeClr val="lt1"/>
-          </a:fontRef>
-        </p:style>
-        <p:txBody>
-          <a:bodyPr rtlCol="0" anchor="ctr"/>
-          <a:lstStyle/>
-          <a:p/>
-        </p:txBody>
-      </p:sp>
-      <p:sp>
-        <p:nvSpPr>
-          <p:cNvPr id="11" name="Rectangle 10"/>
-          <p:cNvSpPr/>
-          <p:nvPr/>
-        </p:nvSpPr>
-        <p:spPr>
-          <a:xfrm>
-            <a:off x="6217920" y="1627632"/>
-            <a:ext cx="50292" cy="1463040"/>
-          </a:xfrm>
-          <a:prstGeom prst="rect">
-            <a:avLst/>
-          </a:prstGeom>
-          <a:solidFill>
-            <a:srgbClr val="6A4C93"/>
-          </a:solidFill>
-          <a:ln>
-            <a:noFill/>
-          </a:ln>
-          <a:effectLst/>
-        </p:spPr>
-        <p:style>
-          <a:lnRef idx="1">
-            <a:schemeClr val="accent1"/>
-          </a:lnRef>
-          <a:fillRef idx="3">
-            <a:schemeClr val="accent1"/>
-          </a:fillRef>
-          <a:effectRef idx="2">
-            <a:schemeClr val="accent1"/>
-          </a:effectRef>
-          <a:fontRef idx="minor">
-            <a:schemeClr val="lt1"/>
-          </a:fontRef>
-        </p:style>
-        <p:txBody>
-          <a:bodyPr rtlCol="0" anchor="ctr"/>
-          <a:lstStyle/>
-          <a:p>
-            <a:pPr algn="ctr"/>
-          </a:p>
-        </p:txBody>
-      </p:sp>
-      <p:sp>
-        <p:nvSpPr>
-          <p:cNvPr id="12" name="TextBox 11"/>
-          <p:cNvSpPr txBox="1"/>
-          <p:nvPr/>
-        </p:nvSpPr>
-        <p:spPr>
-          <a:xfrm>
-            <a:off x="6473952" y="1773936"/>
-            <a:ext cx="4892040" cy="320040"/>
-          </a:xfrm>
-          <a:prstGeom prst="rect">
-            <a:avLst/>
-          </a:prstGeom>
-          <a:noFill/>
-        </p:spPr>
-        <p:txBody>
-          <a:bodyPr wrap="square" anchor="t">
-            <a:spAutoFit/>
-          </a:bodyPr>
-          <a:lstStyle/>
-          <a:p>
-            <a:pPr algn="l"/>
-            <a:r>
-              <a:rPr sz="1200" b="1">
-                <a:solidFill>
-                  <a:srgbClr val="8A9098"/>
-                </a:solidFill>
-                <a:latin typeface="Calibri"/>
-              </a:rPr>
-              <a:t>VIT-HYBRID R26+S/32</a:t>
-            </a:r>
-          </a:p>
-        </p:txBody>
-      </p:sp>
-      <p:sp>
-        <p:nvSpPr>
-          <p:cNvPr id="13" name="TextBox 12"/>
-          <p:cNvSpPr txBox="1"/>
-          <p:nvPr/>
-        </p:nvSpPr>
-        <p:spPr>
-          <a:xfrm>
-            <a:off x="6473952" y="2103120"/>
-            <a:ext cx="4892040" cy="566928"/>
-          </a:xfrm>
-          <a:prstGeom prst="rect">
-            <a:avLst/>
-          </a:prstGeom>
-          <a:noFill/>
-        </p:spPr>
-        <p:txBody>
-          <a:bodyPr wrap="square" anchor="t">
-            <a:spAutoFit/>
-          </a:bodyPr>
-          <a:lstStyle/>
-          <a:p>
-            <a:pPr algn="l"/>
-            <a:r>
-              <a:rPr sz="3000" b="1">
-                <a:solidFill>
-                  <a:srgbClr val="6A4C93"/>
-                </a:solidFill>
-                <a:latin typeface="Calibri"/>
-              </a:rPr>
-              <a:t>QWK 0.941</a:t>
-            </a:r>
-          </a:p>
-        </p:txBody>
-      </p:sp>
-      <p:sp>
-        <p:nvSpPr>
-          <p:cNvPr id="14" name="TextBox 13"/>
-          <p:cNvSpPr txBox="1"/>
-          <p:nvPr/>
-        </p:nvSpPr>
-        <p:spPr>
-          <a:xfrm>
-            <a:off x="6473952" y="2523744"/>
-            <a:ext cx="4892040" cy="457200"/>
-          </a:xfrm>
-          <a:prstGeom prst="rect">
-            <a:avLst/>
-          </a:prstGeom>
-          <a:noFill/>
-        </p:spPr>
-        <p:txBody>
-          <a:bodyPr wrap="square" anchor="t">
-            <a:spAutoFit/>
-          </a:bodyPr>
-          <a:lstStyle/>
-          <a:p>
-            <a:pPr algn="l"/>
-            <a:r>
-              <a:rPr sz="1100" b="0">
-                <a:solidFill>
-                  <a:srgbClr val="8A9098"/>
-                </a:solidFill>
-                <a:latin typeface="Calibri"/>
-              </a:rPr>
-              <a:t>36.0 M params · 6.9 GFLOPs · acc 76.2 %</a:t>
-            </a:r>
-          </a:p>
-        </p:txBody>
-      </p:sp>
-      <p:sp>
-        <p:nvSpPr>
-          <p:cNvPr id="15" name="TextBox 14"/>
-          <p:cNvSpPr txBox="1"/>
-          <p:nvPr/>
-        </p:nvSpPr>
-        <p:spPr>
-          <a:xfrm>
-            <a:off x="640080" y="3410712"/>
-            <a:ext cx="5669280" cy="4206240"/>
-          </a:xfrm>
-          <a:prstGeom prst="rect">
-            <a:avLst/>
-          </a:prstGeom>
-          <a:noFill/>
-        </p:spPr>
-        <p:txBody>
-          <a:bodyPr wrap="square">
-            <a:spAutoFit/>
-          </a:bodyPr>
-          <a:lstStyle/>
-          <a:p>
-            <a:pPr>
-              <a:spcAft>
-                <a:spcPts val="1300"/>
-              </a:spcAft>
-            </a:pPr>
-            <a:r>
-              <a:rPr sz="1250" b="1">
-                <a:solidFill>
-                  <a:srgbClr val="8FB339"/>
-                </a:solidFill>
-              </a:rPr>
-              <a:t>▪  </a:t>
-            </a:r>
-            <a:r>
-              <a:rPr sz="1250" b="0">
-                <a:solidFill>
-                  <a:srgbClr val="444A52"/>
-                </a:solidFill>
-              </a:rPr>
-              <a:t>Techo de un oráculo que eligiera siempre el modelo correcto: 82.0 %. Ambos fallan a la vez en 18.0 % de las imágenes.</a:t>
-            </a:r>
-          </a:p>
-          <a:p>
-            <a:pPr>
-              <a:spcAft>
-                <a:spcPts val="1300"/>
-              </a:spcAft>
-            </a:pPr>
-            <a:r>
-              <a:rPr sz="1250" b="1">
-                <a:solidFill>
-                  <a:srgbClr val="8FB339"/>
-                </a:solidFill>
-              </a:rPr>
-              <a:t>▪  </a:t>
-            </a:r>
-            <a:r>
-              <a:rPr sz="1250" b="1">
-                <a:solidFill>
-                  <a:srgbClr val="444A52"/>
-                </a:solidFill>
-              </a:rPr>
-              <a:t>La fusión tardía cuesta el doble de cómputo por imagen.</a:t>
-            </a:r>
-          </a:p>
-          <a:p>
-            <a:pPr>
-              <a:spcAft>
-                <a:spcPts val="1300"/>
-              </a:spcAft>
-            </a:pPr>
-            <a:r>
-              <a:rPr sz="1250" b="1">
-                <a:solidFill>
-                  <a:srgbClr val="8FB339"/>
-                </a:solidFill>
-              </a:rPr>
-              <a:t>▪  </a:t>
-            </a:r>
-            <a:r>
-              <a:rPr sz="1250" b="0">
-                <a:solidFill>
-                  <a:srgbClr val="444A52"/>
-                </a:solidFill>
-              </a:rPr>
-              <a:t>Dos backbones completos en el forward. La pregunta no es si mejora, sino si mejora lo suficiente para justificar 2× de latencia.</a:t>
-            </a:r>
-          </a:p>
-          <a:p>
-            <a:pPr>
-              <a:spcAft>
-                <a:spcPts val="1300"/>
-              </a:spcAft>
-            </a:pPr>
-            <a:r>
-              <a:rPr sz="1250" b="1">
-                <a:solidFill>
-                  <a:srgbClr val="8FB339"/>
-                </a:solidFill>
-              </a:rPr>
-              <a:t>▪  </a:t>
-            </a:r>
-            <a:r>
-              <a:rPr sz="1250" b="0">
-                <a:solidFill>
-                  <a:srgbClr val="444A52"/>
-                </a:solidFill>
-              </a:rPr>
-              <a:t>El ViT-Hybrid R26 no es equiparable: 36 M de parámetros y pesos de ImageNet-21k. Va como cota superior de referencia, no como competidor.</a:t>
-            </a:r>
-          </a:p>
-        </p:txBody>
-      </p:sp>
       <p:pic>
         <p:nvPicPr>
-          <p:cNvPr id="16" name="Picture 15" descr="13_costo_beneficio_final.png"/>
+          <p:cNvPr id="5" name="Picture 4" descr="10_matrices_confusion_final.png"/>
           <p:cNvPicPr>
             <a:picLocks noChangeAspect="1"/>
           </p:cNvPicPr>
@@ -11950,8 +12847,8 @@
         </p:blipFill>
         <p:spPr>
           <a:xfrm>
-            <a:off x="6492240" y="3547872"/>
-            <a:ext cx="4625027" cy="2194560"/>
+            <a:off x="640080" y="1627632"/>
+            <a:ext cx="5760720" cy="4201745"/>
           </a:xfrm>
           <a:prstGeom prst="rect">
             <a:avLst/>
@@ -11960,14 +12857,14 @@
       </p:pic>
       <p:sp>
         <p:nvSpPr>
-          <p:cNvPr id="17" name="TextBox 16"/>
+          <p:cNvPr id="6" name="TextBox 5"/>
           <p:cNvSpPr txBox="1"/>
           <p:nvPr/>
         </p:nvSpPr>
         <p:spPr>
           <a:xfrm>
-            <a:off x="11140135" y="6355080"/>
-            <a:ext cx="640080" cy="320040"/>
+            <a:off x="6675120" y="1627632"/>
+            <a:ext cx="4937760" cy="4206240"/>
           </a:xfrm>
           <a:prstGeom prst="rect">
             <a:avLst/>
@@ -11975,6 +12872,213 @@
           <a:noFill/>
         </p:spPr>
         <p:txBody>
+          <a:bodyPr wrap="square">
+            <a:spAutoFit/>
+          </a:bodyPr>
+          <a:lstStyle/>
+          <a:p>
+            <a:pPr>
+              <a:spcAft>
+                <a:spcPts val="900"/>
+              </a:spcAft>
+            </a:pPr>
+            <a:r>
+              <a:rPr sz="1150" b="1">
+                <a:solidFill>
+                  <a:srgbClr val="8FB339"/>
+                </a:solidFill>
+              </a:rPr>
+              <a:t>▪  </a:t>
+            </a:r>
+            <a:r>
+              <a:rPr sz="1150" b="1">
+                <a:solidFill>
+                  <a:srgbClr val="444A52"/>
+                </a:solidFill>
+              </a:rPr>
+              <a:t>ViT-S/16:  Δ QWK = -0.0042  [-0.0095, +0.0006]  p = 0.095  → NO significativa</a:t>
+            </a:r>
+          </a:p>
+          <a:p>
+            <a:pPr>
+              <a:spcAft>
+                <a:spcPts val="900"/>
+              </a:spcAft>
+            </a:pPr>
+            <a:r>
+              <a:rPr sz="1150" b="1">
+                <a:solidFill>
+                  <a:srgbClr val="8FB339"/>
+                </a:solidFill>
+              </a:rPr>
+              <a:t>▪  </a:t>
+            </a:r>
+            <a:r>
+              <a:rPr sz="1150" b="1">
+                <a:solidFill>
+                  <a:srgbClr val="444A52"/>
+                </a:solidFill>
+              </a:rPr>
+              <a:t>ResNet-50 (scratch):  Δ QWK = -0.0203  [-0.0283, -0.0123]  p = 0.000  → significativa</a:t>
+            </a:r>
+          </a:p>
+          <a:p>
+            <a:pPr>
+              <a:spcAft>
+                <a:spcPts val="900"/>
+              </a:spcAft>
+            </a:pPr>
+            <a:r>
+              <a:rPr sz="1150" b="1">
+                <a:solidFill>
+                  <a:srgbClr val="8FB339"/>
+                </a:solidFill>
+              </a:rPr>
+              <a:t>▪  </a:t>
+            </a:r>
+            <a:r>
+              <a:rPr sz="1150" b="1">
+                <a:solidFill>
+                  <a:srgbClr val="444A52"/>
+                </a:solidFill>
+              </a:rPr>
+              <a:t>ViT-S/16 (scratch):  Δ QWK = -0.0465  [-0.0692, -0.0316]  p = 0.000  → significativa</a:t>
+            </a:r>
+          </a:p>
+          <a:p>
+            <a:pPr>
+              <a:spcAft>
+                <a:spcPts val="900"/>
+              </a:spcAft>
+            </a:pPr>
+            <a:r>
+              <a:rPr sz="1150" b="1">
+                <a:solidFill>
+                  <a:srgbClr val="8FB339"/>
+                </a:solidFill>
+              </a:rPr>
+              <a:t>▪  </a:t>
+            </a:r>
+            <a:r>
+              <a:rPr sz="1150" b="1">
+                <a:solidFill>
+                  <a:srgbClr val="444A52"/>
+                </a:solidFill>
+              </a:rPr>
+              <a:t>Híbrido · fusión tardía:  Δ QWK = +0.0055  [+0.0021, +0.0087]  p = 0.001  → significativa</a:t>
+            </a:r>
+          </a:p>
+          <a:p>
+            <a:pPr>
+              <a:spcAft>
+                <a:spcPts val="900"/>
+              </a:spcAft>
+            </a:pPr>
+            <a:r>
+              <a:rPr sz="1150" b="1">
+                <a:solidFill>
+                  <a:srgbClr val="8FB339"/>
+                </a:solidFill>
+              </a:rPr>
+              <a:t>▪  </a:t>
+            </a:r>
+            <a:r>
+              <a:rPr sz="1150" b="1">
+                <a:solidFill>
+                  <a:srgbClr val="444A52"/>
+                </a:solidFill>
+              </a:rPr>
+              <a:t>ViT-Hybrid R26+S/32:  Δ QWK = +0.0055  [+0.0005, +0.0104]  p = 0.031  → significativa</a:t>
+            </a:r>
+          </a:p>
+          <a:p>
+            <a:pPr>
+              <a:spcAft>
+                <a:spcPts val="900"/>
+              </a:spcAft>
+            </a:pPr>
+            <a:r>
+              <a:rPr sz="1150" b="1">
+                <a:solidFill>
+                  <a:srgbClr val="8FB339"/>
+                </a:solidFill>
+              </a:rPr>
+              <a:t>▪  </a:t>
+            </a:r>
+            <a:r>
+              <a:rPr sz="1150" b="0">
+                <a:solidFill>
+                  <a:srgbClr val="444A52"/>
+                </a:solidFill>
+              </a:rPr>
+              <a:t>Todas las matrices son bandeadas: los errores de distancia ≥ 2 son casi inexistentes. Ningún modelo confunde una palta verde con una sobremadura.</a:t>
+            </a:r>
+          </a:p>
+          <a:p>
+            <a:pPr>
+              <a:spcAft>
+                <a:spcPts val="900"/>
+              </a:spcAft>
+            </a:pPr>
+            <a:r>
+              <a:rPr sz="1150" b="1">
+                <a:solidFill>
+                  <a:srgbClr val="8FB339"/>
+                </a:solidFill>
+              </a:rPr>
+              <a:t>▪  </a:t>
+            </a:r>
+            <a:r>
+              <a:rPr sz="1150" b="0">
+                <a:solidFill>
+                  <a:srgbClr val="444A52"/>
+                </a:solidFill>
+              </a:rPr>
+              <a:t>El cuello de botella son las clases intermedias (2, 3 y 4), donde la frontera es un corte continuo y las etiquetas son más subjetivas.</a:t>
+            </a:r>
+          </a:p>
+          <a:p>
+            <a:pPr>
+              <a:spcAft>
+                <a:spcPts val="900"/>
+              </a:spcAft>
+            </a:pPr>
+            <a:r>
+              <a:rPr sz="1150" b="1">
+                <a:solidFill>
+                  <a:srgbClr val="8FB339"/>
+                </a:solidFill>
+              </a:rPr>
+              <a:t>▪  </a:t>
+            </a:r>
+            <a:r>
+              <a:rPr sz="1150" b="0">
+                <a:solidFill>
+                  <a:srgbClr val="444A52"/>
+                </a:solidFill>
+              </a:rPr>
+              <a:t>Los dos modelos desde cero pierden la estructura: el ViT colapsa hacia las clases altas y predice 4 para el 68 % de las paltas que son clase 5.</a:t>
+            </a:r>
+          </a:p>
+        </p:txBody>
+      </p:sp>
+      <p:sp>
+        <p:nvSpPr>
+          <p:cNvPr id="7" name="TextBox 6"/>
+          <p:cNvSpPr txBox="1"/>
+          <p:nvPr/>
+        </p:nvSpPr>
+        <p:spPr>
+          <a:xfrm>
+            <a:off x="11140135" y="6355080"/>
+            <a:ext cx="640080" cy="320040"/>
+          </a:xfrm>
+          <a:prstGeom prst="rect">
+            <a:avLst/>
+          </a:prstGeom>
+          <a:noFill/>
+        </p:spPr>
+        <p:txBody>
           <a:bodyPr wrap="square" anchor="t">
             <a:spAutoFit/>
           </a:bodyPr>
@@ -11988,7 +13092,7 @@
                 </a:solidFill>
                 <a:latin typeface="Calibri"/>
               </a:rPr>
-              <a:t>9/13</a:t>
+              <a:t>9/15</a:t>
             </a:r>
           </a:p>
         </p:txBody>
